--- a/output/wordlabs-mit-3day.pptx
+++ b/output/wordlabs-mit-3day.pptx
@@ -5622,7 +5622,7 @@
                 <a:ea typeface="Trebuchet MS" pitchFamily="34" charset="-122"/>
                 <a:cs typeface="Trebuchet MS" pitchFamily="34" charset="-120"/>
               </a:rPr>
-              <a:t>1</a:t>
+              <a:t>0</a:t>
             </a:r>
             <a:pPr algn="ctr" indent="0" marL="0">
               <a:buNone/>
@@ -6040,7 +6040,7 @@
                 <a:ea typeface="Calibri" pitchFamily="34" charset="-122"/>
                 <a:cs typeface="Calibri" pitchFamily="34" charset="-120"/>
               </a:rPr>
-              <a:t>Will the teacher </a:t>
+              <a:t>The scientist needed to </a:t>
             </a:r>
             <a:pPr algn="l" indent="0" marL="0">
               <a:buNone/>
@@ -6057,7 +6057,7 @@
                 <a:ea typeface="Calibri" pitchFamily="34" charset="-122"/>
                 <a:cs typeface="Calibri" pitchFamily="34" charset="-120"/>
               </a:rPr>
-              <a:t>permit</a:t>
+              <a:t>emit</a:t>
             </a:r>
             <a:pPr algn="l" indent="0" marL="0">
               <a:buNone/>
@@ -6071,7 +6071,7 @@
                 <a:ea typeface="Calibri" pitchFamily="34" charset="-122"/>
                 <a:cs typeface="Calibri" pitchFamily="34" charset="-120"/>
               </a:rPr>
-              <a:t> you to </a:t>
+              <a:t> a signal and then </a:t>
             </a:r>
             <a:pPr algn="l" indent="0" marL="0">
               <a:buNone/>
@@ -6102,7 +6102,7 @@
                 <a:ea typeface="Calibri" pitchFamily="34" charset="-122"/>
                 <a:cs typeface="Calibri" pitchFamily="34" charset="-120"/>
               </a:rPr>
-              <a:t> your assignment a day late?</a:t>
+              <a:t> the results to her team.</a:t>
             </a:r>
             <a:endParaRPr lang="en-US" sz="1800" dirty="0"/>
           </a:p>
@@ -6257,7 +6257,7 @@
                 <a:ea typeface="Trebuchet MS" pitchFamily="34" charset="-122"/>
                 <a:cs typeface="Trebuchet MS" pitchFamily="34" charset="-120"/>
               </a:rPr>
-              <a:t>permit</a:t>
+              <a:t>emit</a:t>
             </a:r>
             <a:endParaRPr lang="en-US" sz="1400" dirty="0"/>
           </a:p>
@@ -6855,7 +6855,7 @@
                 <a:ea typeface="Trebuchet MS" pitchFamily="34" charset="-122"/>
                 <a:cs typeface="Trebuchet MS" pitchFamily="34" charset="-120"/>
               </a:rPr>
-              <a:t>permit</a:t>
+              <a:t>emit</a:t>
             </a:r>
             <a:endParaRPr lang="en-US" sz="2800" dirty="0"/>
           </a:p>
@@ -7682,7 +7682,7 @@
                 <a:ea typeface="Trebuchet MS" pitchFamily="34" charset="-122"/>
                 <a:cs typeface="Trebuchet MS" pitchFamily="34" charset="-120"/>
               </a:rPr>
-              <a:t>permit</a:t>
+              <a:t>emit</a:t>
             </a:r>
             <a:endParaRPr lang="en-US" sz="2800" dirty="0"/>
           </a:p>
@@ -7821,7 +7821,7 @@
                 <a:ea typeface="Trebuchet MS" pitchFamily="34" charset="-122"/>
                 <a:cs typeface="Trebuchet MS" pitchFamily="34" charset="-120"/>
               </a:rPr>
-              <a:t>per</a:t>
+              <a:t>e</a:t>
             </a:r>
             <a:endParaRPr lang="en-US" sz="1300" dirty="0"/>
           </a:p>
@@ -7860,7 +7860,7 @@
                 <a:ea typeface="Calibri" pitchFamily="34" charset="-122"/>
                 <a:cs typeface="Calibri" pitchFamily="34" charset="-120"/>
               </a:rPr>
-              <a:t>through, thoroughly</a:t>
+              <a:t>out, from</a:t>
             </a:r>
             <a:endParaRPr lang="en-US" sz="850" dirty="0"/>
           </a:p>
@@ -7972,7 +7972,7 @@
                 <a:ea typeface="Calibri" pitchFamily="34" charset="-122"/>
                 <a:cs typeface="Calibri" pitchFamily="34" charset="-120"/>
               </a:rPr>
-              <a:t>send, let go</a:t>
+              <a:t>send</a:t>
             </a:r>
             <a:endParaRPr lang="en-US" sz="850" dirty="0"/>
           </a:p>
@@ -8667,7 +8667,7 @@
                 <a:ea typeface="Trebuchet MS" pitchFamily="34" charset="-122"/>
                 <a:cs typeface="Trebuchet MS" pitchFamily="34" charset="-120"/>
               </a:rPr>
-              <a:t>permit</a:t>
+              <a:t>emit</a:t>
             </a:r>
             <a:endParaRPr lang="en-US" sz="2800" dirty="0"/>
           </a:p>
@@ -8806,7 +8806,7 @@
                 <a:ea typeface="Trebuchet MS" pitchFamily="34" charset="-122"/>
                 <a:cs typeface="Trebuchet MS" pitchFamily="34" charset="-120"/>
               </a:rPr>
-              <a:t>per</a:t>
+              <a:t>e</a:t>
             </a:r>
             <a:endParaRPr lang="en-US" sz="1300" dirty="0"/>
           </a:p>
@@ -8845,7 +8845,7 @@
                 <a:ea typeface="Calibri" pitchFamily="34" charset="-122"/>
                 <a:cs typeface="Calibri" pitchFamily="34" charset="-120"/>
               </a:rPr>
-              <a:t>through, thoroughly</a:t>
+              <a:t>out, from</a:t>
             </a:r>
             <a:endParaRPr lang="en-US" sz="850" dirty="0"/>
           </a:p>
@@ -8957,7 +8957,7 @@
                 <a:ea typeface="Calibri" pitchFamily="34" charset="-122"/>
                 <a:cs typeface="Calibri" pitchFamily="34" charset="-120"/>
               </a:rPr>
-              <a:t>send, let go</a:t>
+              <a:t>send</a:t>
             </a:r>
             <a:endParaRPr lang="en-US" sz="850" dirty="0"/>
           </a:p>
@@ -9116,7 +9116,7 @@
                 <a:ea typeface="Trebuchet MS" pitchFamily="34" charset="-122"/>
                 <a:cs typeface="Trebuchet MS" pitchFamily="34" charset="-120"/>
               </a:rPr>
-              <a:t>per</a:t>
+              <a:t>e</a:t>
             </a:r>
             <a:endParaRPr lang="en-US" sz="1400" dirty="0"/>
           </a:p>
@@ -9784,7 +9784,7 @@
                 <a:ea typeface="Trebuchet MS" pitchFamily="34" charset="-122"/>
                 <a:cs typeface="Trebuchet MS" pitchFamily="34" charset="-120"/>
               </a:rPr>
-              <a:t>permit</a:t>
+              <a:t>emit</a:t>
             </a:r>
             <a:endParaRPr lang="en-US" sz="2800" dirty="0"/>
           </a:p>
@@ -9923,7 +9923,7 @@
                 <a:ea typeface="Trebuchet MS" pitchFamily="34" charset="-122"/>
                 <a:cs typeface="Trebuchet MS" pitchFamily="34" charset="-120"/>
               </a:rPr>
-              <a:t>per</a:t>
+              <a:t>e</a:t>
             </a:r>
             <a:endParaRPr lang="en-US" sz="1300" dirty="0"/>
           </a:p>
@@ -9962,7 +9962,7 @@
                 <a:ea typeface="Calibri" pitchFamily="34" charset="-122"/>
                 <a:cs typeface="Calibri" pitchFamily="34" charset="-120"/>
               </a:rPr>
-              <a:t>through, thoroughly</a:t>
+              <a:t>out, from</a:t>
             </a:r>
             <a:endParaRPr lang="en-US" sz="850" dirty="0"/>
           </a:p>
@@ -10074,7 +10074,7 @@
                 <a:ea typeface="Calibri" pitchFamily="34" charset="-122"/>
                 <a:cs typeface="Calibri" pitchFamily="34" charset="-120"/>
               </a:rPr>
-              <a:t>send, let go</a:t>
+              <a:t>send</a:t>
             </a:r>
             <a:endParaRPr lang="en-US" sz="850" dirty="0"/>
           </a:p>
@@ -10233,7 +10233,7 @@
                 <a:ea typeface="Trebuchet MS" pitchFamily="34" charset="-122"/>
                 <a:cs typeface="Trebuchet MS" pitchFamily="34" charset="-120"/>
               </a:rPr>
-              <a:t>per</a:t>
+              <a:t>e</a:t>
             </a:r>
             <a:endParaRPr lang="en-US" sz="1400" dirty="0"/>
           </a:p>
@@ -10445,7 +10445,7 @@
         </p:nvSpPr>
         <p:spPr>
           <a:xfrm>
-            <a:off x="2427732" y="4169664"/>
+            <a:off x="2670048" y="4169664"/>
             <a:ext cx="685800" cy="475488"/>
           </a:xfrm>
           <a:prstGeom prst="rect">
@@ -10472,7 +10472,7 @@
         </p:nvSpPr>
         <p:spPr>
           <a:xfrm>
-            <a:off x="2427732" y="4169664"/>
+            <a:off x="2670048" y="4169664"/>
             <a:ext cx="685800" cy="475488"/>
           </a:xfrm>
           <a:prstGeom prst="rect">
@@ -10497,7 +10497,7 @@
                 <a:ea typeface="Trebuchet MS" pitchFamily="34" charset="-122"/>
                 <a:cs typeface="Trebuchet MS" pitchFamily="34" charset="-120"/>
               </a:rPr>
-              <a:t>p</a:t>
+              <a:t>e</a:t>
             </a:r>
             <a:endParaRPr lang="en-US" sz="900" dirty="0"/>
           </a:p>
@@ -10511,7 +10511,7 @@
         </p:nvSpPr>
         <p:spPr>
           <a:xfrm>
-            <a:off x="3639312" y="4169664"/>
+            <a:off x="4123944" y="4169664"/>
             <a:ext cx="685800" cy="475488"/>
           </a:xfrm>
           <a:prstGeom prst="rect">
@@ -10538,7 +10538,7 @@
         </p:nvSpPr>
         <p:spPr>
           <a:xfrm>
-            <a:off x="3639312" y="4169664"/>
+            <a:off x="4123944" y="4169664"/>
             <a:ext cx="685800" cy="475488"/>
           </a:xfrm>
           <a:prstGeom prst="rect">
@@ -10563,7 +10563,7 @@
                 <a:ea typeface="Trebuchet MS" pitchFamily="34" charset="-122"/>
                 <a:cs typeface="Trebuchet MS" pitchFamily="34" charset="-120"/>
               </a:rPr>
-              <a:t>er</a:t>
+              <a:t>m</a:t>
             </a:r>
             <a:endParaRPr lang="en-US" sz="900" dirty="0"/>
           </a:p>
@@ -10577,7 +10577,7 @@
         </p:nvSpPr>
         <p:spPr>
           <a:xfrm>
-            <a:off x="4850892" y="4169664"/>
+            <a:off x="5577840" y="4169664"/>
             <a:ext cx="685800" cy="475488"/>
           </a:xfrm>
           <a:prstGeom prst="rect">
@@ -10604,7 +10604,7 @@
         </p:nvSpPr>
         <p:spPr>
           <a:xfrm>
-            <a:off x="4850892" y="4169664"/>
+            <a:off x="5577840" y="4169664"/>
             <a:ext cx="685800" cy="475488"/>
           </a:xfrm>
           <a:prstGeom prst="rect">
@@ -10629,7 +10629,7 @@
                 <a:ea typeface="Trebuchet MS" pitchFamily="34" charset="-122"/>
                 <a:cs typeface="Trebuchet MS" pitchFamily="34" charset="-120"/>
               </a:rPr>
-              <a:t>m</a:t>
+              <a:t>i</a:t>
             </a:r>
             <a:endParaRPr lang="en-US" sz="900" dirty="0"/>
           </a:p>
@@ -10643,7 +10643,7 @@
         </p:nvSpPr>
         <p:spPr>
           <a:xfrm>
-            <a:off x="6062472" y="4169664"/>
+            <a:off x="7031736" y="4169664"/>
             <a:ext cx="685800" cy="475488"/>
           </a:xfrm>
           <a:prstGeom prst="rect">
@@ -10670,73 +10670,7 @@
         </p:nvSpPr>
         <p:spPr>
           <a:xfrm>
-            <a:off x="6062472" y="4169664"/>
-            <a:ext cx="685800" cy="475488"/>
-          </a:xfrm>
-          <a:prstGeom prst="rect">
-            <a:avLst/>
-          </a:prstGeom>
-          <a:noFill/>
-          <a:ln/>
-        </p:spPr>
-        <p:txBody>
-          <a:bodyPr wrap="square" lIns="0" tIns="0" rIns="0" bIns="0" rtlCol="0" anchor="ctr"/>
-          <a:lstStyle/>
-          <a:p>
-            <a:pPr algn="ctr" indent="0" marL="0">
-              <a:buNone/>
-            </a:pPr>
-            <a:r>
-              <a:rPr lang="en-US" sz="900" b="1" dirty="0">
-                <a:solidFill>
-                  <a:srgbClr val="9D174D"/>
-                </a:solidFill>
-                <a:latin typeface="Trebuchet MS" pitchFamily="34" charset="0"/>
-                <a:ea typeface="Trebuchet MS" pitchFamily="34" charset="-122"/>
-                <a:cs typeface="Trebuchet MS" pitchFamily="34" charset="-120"/>
-              </a:rPr>
-              <a:t>i</a:t>
-            </a:r>
-            <a:endParaRPr lang="en-US" sz="900" dirty="0"/>
-          </a:p>
-        </p:txBody>
-      </p:sp>
-      <p:sp>
-        <p:nvSpPr>
-          <p:cNvPr id="41" name="Shape 39"/>
-          <p:cNvSpPr/>
-          <p:nvPr/>
-        </p:nvSpPr>
-        <p:spPr>
-          <a:xfrm>
-            <a:off x="7274052" y="4169664"/>
-            <a:ext cx="685800" cy="475488"/>
-          </a:xfrm>
-          <a:prstGeom prst="rect">
-            <a:avLst>
-              <a:gd name="adj" fmla="val 7692"/>
-            </a:avLst>
-          </a:prstGeom>
-          <a:solidFill>
-            <a:srgbClr val="FFFFFF"/>
-          </a:solidFill>
-          <a:ln w="12700">
-            <a:solidFill>
-              <a:srgbClr val="DB2777"/>
-            </a:solidFill>
-            <a:prstDash val="solid"/>
-          </a:ln>
-        </p:spPr>
-      </p:sp>
-      <p:sp>
-        <p:nvSpPr>
-          <p:cNvPr id="42" name="Text 40"/>
-          <p:cNvSpPr/>
-          <p:nvPr/>
-        </p:nvSpPr>
-        <p:spPr>
-          <a:xfrm>
-            <a:off x="7274052" y="4169664"/>
+            <a:off x="7031736" y="4169664"/>
             <a:ext cx="685800" cy="475488"/>
           </a:xfrm>
           <a:prstGeom prst="rect">
@@ -12197,7 +12131,7 @@
                 <a:ea typeface="Calibri" pitchFamily="34" charset="-122"/>
                 <a:cs typeface="Calibri" pitchFamily="34" charset="-120"/>
               </a:rPr>
-              <a:t>under, up to</a:t>
+              <a:t>under, below</a:t>
             </a:r>
             <a:endParaRPr lang="en-US" sz="850" dirty="0"/>
           </a:p>
@@ -12309,7 +12243,7 @@
                 <a:ea typeface="Calibri" pitchFamily="34" charset="-122"/>
                 <a:cs typeface="Calibri" pitchFamily="34" charset="-120"/>
               </a:rPr>
-              <a:t>send, let go</a:t>
+              <a:t>send</a:t>
             </a:r>
             <a:endParaRPr lang="en-US" sz="850" dirty="0"/>
           </a:p>
@@ -13182,7 +13116,7 @@
                 <a:ea typeface="Calibri" pitchFamily="34" charset="-122"/>
                 <a:cs typeface="Calibri" pitchFamily="34" charset="-120"/>
               </a:rPr>
-              <a:t>under, up to</a:t>
+              <a:t>under, below</a:t>
             </a:r>
             <a:endParaRPr lang="en-US" sz="850" dirty="0"/>
           </a:p>
@@ -13294,7 +13228,7 @@
                 <a:ea typeface="Calibri" pitchFamily="34" charset="-122"/>
                 <a:cs typeface="Calibri" pitchFamily="34" charset="-120"/>
               </a:rPr>
-              <a:t>send, let go</a:t>
+              <a:t>send</a:t>
             </a:r>
             <a:endParaRPr lang="en-US" sz="850" dirty="0"/>
           </a:p>
@@ -14564,7 +14498,7 @@
                 <a:ea typeface="Calibri" pitchFamily="34" charset="-122"/>
                 <a:cs typeface="Calibri" pitchFamily="34" charset="-120"/>
               </a:rPr>
-              <a:t>under, up to</a:t>
+              <a:t>under, below</a:t>
             </a:r>
             <a:endParaRPr lang="en-US" sz="850" dirty="0"/>
           </a:p>
@@ -14676,7 +14610,7 @@
                 <a:ea typeface="Calibri" pitchFamily="34" charset="-122"/>
                 <a:cs typeface="Calibri" pitchFamily="34" charset="-120"/>
               </a:rPr>
-              <a:t>send, let go</a:t>
+              <a:t>send</a:t>
             </a:r>
             <a:endParaRPr lang="en-US" sz="850" dirty="0"/>
           </a:p>
@@ -16755,7 +16689,7 @@
                 <a:ea typeface="Calibri" pitchFamily="34" charset="-122"/>
                 <a:cs typeface="Calibri" pitchFamily="34" charset="-120"/>
               </a:rPr>
-              <a:t>When you </a:t>
+              <a:t>We must </a:t>
             </a:r>
             <a:pPr algn="l" indent="0" marL="0">
               <a:buNone/>
@@ -16772,7 +16706,7 @@
                 <a:ea typeface="Calibri" pitchFamily="34" charset="-122"/>
                 <a:cs typeface="Calibri" pitchFamily="34" charset="-120"/>
               </a:rPr>
-              <a:t>transmit</a:t>
+              <a:t>commit</a:t>
             </a:r>
             <a:pPr algn="l" indent="0" marL="0">
               <a:buNone/>
@@ -16786,7 +16720,7 @@
                 <a:ea typeface="Calibri" pitchFamily="34" charset="-122"/>
                 <a:cs typeface="Calibri" pitchFamily="34" charset="-120"/>
               </a:rPr>
-              <a:t> a message, you must </a:t>
+              <a:t> to the project, </a:t>
             </a:r>
             <a:pPr algn="l" indent="0" marL="0">
               <a:buNone/>
@@ -16817,7 +16751,7 @@
                 <a:ea typeface="Calibri" pitchFamily="34" charset="-122"/>
                 <a:cs typeface="Calibri" pitchFamily="34" charset="-120"/>
               </a:rPr>
-              <a:t> that it was sent, and you are </a:t>
+              <a:t> our mistakes, and always </a:t>
             </a:r>
             <a:pPr algn="l" indent="0" marL="0">
               <a:buNone/>
@@ -16834,7 +16768,7 @@
                 <a:ea typeface="Calibri" pitchFamily="34" charset="-122"/>
                 <a:cs typeface="Calibri" pitchFamily="34" charset="-120"/>
               </a:rPr>
-              <a:t>committed</a:t>
+              <a:t>permit</a:t>
             </a:r>
             <a:pPr algn="l" indent="0" marL="0">
               <a:buNone/>
@@ -16848,7 +16782,7 @@
                 <a:ea typeface="Calibri" pitchFamily="34" charset="-122"/>
                 <a:cs typeface="Calibri" pitchFamily="34" charset="-120"/>
               </a:rPr>
-              <a:t> to telling the truth.</a:t>
+              <a:t> others to share their ideas.</a:t>
             </a:r>
             <a:endParaRPr lang="en-US" sz="1800" dirty="0"/>
           </a:p>
@@ -17003,7 +16937,7 @@
                 <a:ea typeface="Trebuchet MS" pitchFamily="34" charset="-122"/>
                 <a:cs typeface="Trebuchet MS" pitchFamily="34" charset="-120"/>
               </a:rPr>
-              <a:t>transmit</a:t>
+              <a:t>commit</a:t>
             </a:r>
             <a:endParaRPr lang="en-US" sz="1400" dirty="0"/>
           </a:p>
@@ -17259,7 +17193,7 @@
                 <a:ea typeface="Trebuchet MS" pitchFamily="34" charset="-122"/>
                 <a:cs typeface="Trebuchet MS" pitchFamily="34" charset="-120"/>
               </a:rPr>
-              <a:t>committed</a:t>
+              <a:t>permit</a:t>
             </a:r>
             <a:endParaRPr lang="en-US" sz="1400" dirty="0"/>
           </a:p>
@@ -17729,7 +17663,7 @@
                 <a:ea typeface="Trebuchet MS" pitchFamily="34" charset="-122"/>
                 <a:cs typeface="Trebuchet MS" pitchFamily="34" charset="-120"/>
               </a:rPr>
-              <a:t>transmit</a:t>
+              <a:t>commit</a:t>
             </a:r>
             <a:endParaRPr lang="en-US" sz="2800" dirty="0"/>
           </a:p>
@@ -18556,7 +18490,7 @@
                 <a:ea typeface="Trebuchet MS" pitchFamily="34" charset="-122"/>
                 <a:cs typeface="Trebuchet MS" pitchFamily="34" charset="-120"/>
               </a:rPr>
-              <a:t>transmit</a:t>
+              <a:t>commit</a:t>
             </a:r>
             <a:endParaRPr lang="en-US" sz="2800" dirty="0"/>
           </a:p>
@@ -18695,7 +18629,7 @@
                 <a:ea typeface="Trebuchet MS" pitchFamily="34" charset="-122"/>
                 <a:cs typeface="Trebuchet MS" pitchFamily="34" charset="-120"/>
               </a:rPr>
-              <a:t>trans</a:t>
+              <a:t>com</a:t>
             </a:r>
             <a:endParaRPr lang="en-US" sz="1300" dirty="0"/>
           </a:p>
@@ -18734,7 +18668,7 @@
                 <a:ea typeface="Calibri" pitchFamily="34" charset="-122"/>
                 <a:cs typeface="Calibri" pitchFamily="34" charset="-120"/>
               </a:rPr>
-              <a:t>across, through</a:t>
+              <a:t>together, with</a:t>
             </a:r>
             <a:endParaRPr lang="en-US" sz="850" dirty="0"/>
           </a:p>
@@ -18742,7 +18676,46 @@
       </p:sp>
       <p:sp>
         <p:nvSpPr>
-          <p:cNvPr id="19" name="Shape 17"/>
+          <p:cNvPr id="19" name="Text 17"/>
+          <p:cNvSpPr/>
+          <p:nvPr/>
+        </p:nvSpPr>
+        <p:spPr>
+          <a:xfrm>
+            <a:off x="2938272" y="2752344"/>
+            <a:ext cx="1828800" cy="182880"/>
+          </a:xfrm>
+          <a:prstGeom prst="rect">
+            <a:avLst/>
+          </a:prstGeom>
+          <a:noFill/>
+          <a:ln/>
+        </p:spPr>
+        <p:txBody>
+          <a:bodyPr wrap="square" lIns="0" tIns="0" rIns="0" bIns="0" rtlCol="0" anchor="t"/>
+          <a:lstStyle/>
+          <a:p>
+            <a:pPr algn="ctr" indent="0" marL="0">
+              <a:buNone/>
+            </a:pPr>
+            <a:r>
+              <a:rPr lang="en-US" sz="700" i="1" dirty="0">
+                <a:solidFill>
+                  <a:srgbClr val="94A3B8"/>
+                </a:solidFill>
+                <a:latin typeface="Calibri" pitchFamily="34" charset="0"/>
+                <a:ea typeface="Calibri" pitchFamily="34" charset="-122"/>
+                <a:cs typeface="Calibri" pitchFamily="34" charset="-120"/>
+              </a:rPr>
+              <a:t>con → com before 'm'</a:t>
+            </a:r>
+            <a:endParaRPr lang="en-US" sz="700" dirty="0"/>
+          </a:p>
+        </p:txBody>
+      </p:sp>
+      <p:sp>
+        <p:nvSpPr>
+          <p:cNvPr id="20" name="Shape 18"/>
           <p:cNvSpPr/>
           <p:nvPr/>
         </p:nvSpPr>
@@ -18776,7 +18749,7 @@
       </p:sp>
       <p:sp>
         <p:nvSpPr>
-          <p:cNvPr id="20" name="Text 18"/>
+          <p:cNvPr id="21" name="Text 19"/>
           <p:cNvSpPr/>
           <p:nvPr/>
         </p:nvSpPr>
@@ -18815,7 +18788,7 @@
       </p:sp>
       <p:sp>
         <p:nvSpPr>
-          <p:cNvPr id="21" name="Text 19"/>
+          <p:cNvPr id="22" name="Text 20"/>
           <p:cNvSpPr/>
           <p:nvPr/>
         </p:nvSpPr>
@@ -18846,7 +18819,7 @@
                 <a:ea typeface="Calibri" pitchFamily="34" charset="-122"/>
                 <a:cs typeface="Calibri" pitchFamily="34" charset="-120"/>
               </a:rPr>
-              <a:t>send, let go</a:t>
+              <a:t>send</a:t>
             </a:r>
             <a:endParaRPr lang="en-US" sz="850" dirty="0"/>
           </a:p>
@@ -18854,7 +18827,7 @@
       </p:sp>
       <p:sp>
         <p:nvSpPr>
-          <p:cNvPr id="22" name="Shape 20"/>
+          <p:cNvPr id="23" name="Shape 21"/>
           <p:cNvSpPr/>
           <p:nvPr/>
         </p:nvSpPr>
@@ -18881,7 +18854,7 @@
       </p:sp>
       <p:sp>
         <p:nvSpPr>
-          <p:cNvPr id="23" name="Text 21"/>
+          <p:cNvPr id="24" name="Text 22"/>
           <p:cNvSpPr/>
           <p:nvPr/>
         </p:nvSpPr>
@@ -18920,7 +18893,7 @@
       </p:sp>
       <p:sp>
         <p:nvSpPr>
-          <p:cNvPr id="24" name="Shape 22"/>
+          <p:cNvPr id="25" name="Shape 23"/>
           <p:cNvSpPr/>
           <p:nvPr/>
         </p:nvSpPr>
@@ -18947,7 +18920,7 @@
       </p:sp>
       <p:sp>
         <p:nvSpPr>
-          <p:cNvPr id="25" name="Text 23"/>
+          <p:cNvPr id="26" name="Text 24"/>
           <p:cNvSpPr/>
           <p:nvPr/>
         </p:nvSpPr>
@@ -18986,7 +18959,7 @@
       </p:sp>
       <p:sp>
         <p:nvSpPr>
-          <p:cNvPr id="26" name="Shape 24"/>
+          <p:cNvPr id="27" name="Shape 25"/>
           <p:cNvSpPr/>
           <p:nvPr/>
         </p:nvSpPr>
@@ -19013,7 +18986,7 @@
       </p:sp>
       <p:sp>
         <p:nvSpPr>
-          <p:cNvPr id="27" name="Text 25"/>
+          <p:cNvPr id="28" name="Text 26"/>
           <p:cNvSpPr/>
           <p:nvPr/>
         </p:nvSpPr>
@@ -19052,7 +19025,7 @@
       </p:sp>
       <p:sp>
         <p:nvSpPr>
-          <p:cNvPr id="28" name="Shape 26"/>
+          <p:cNvPr id="29" name="Shape 27"/>
           <p:cNvSpPr/>
           <p:nvPr/>
         </p:nvSpPr>
@@ -19079,7 +19052,7 @@
       </p:sp>
       <p:sp>
         <p:nvSpPr>
-          <p:cNvPr id="29" name="Text 27"/>
+          <p:cNvPr id="30" name="Text 28"/>
           <p:cNvSpPr/>
           <p:nvPr/>
         </p:nvSpPr>
@@ -19541,7 +19514,7 @@
                 <a:ea typeface="Trebuchet MS" pitchFamily="34" charset="-122"/>
                 <a:cs typeface="Trebuchet MS" pitchFamily="34" charset="-120"/>
               </a:rPr>
-              <a:t>transmit</a:t>
+              <a:t>commit</a:t>
             </a:r>
             <a:endParaRPr lang="en-US" sz="2800" dirty="0"/>
           </a:p>
@@ -19680,7 +19653,7 @@
                 <a:ea typeface="Trebuchet MS" pitchFamily="34" charset="-122"/>
                 <a:cs typeface="Trebuchet MS" pitchFamily="34" charset="-120"/>
               </a:rPr>
-              <a:t>trans</a:t>
+              <a:t>com</a:t>
             </a:r>
             <a:endParaRPr lang="en-US" sz="1300" dirty="0"/>
           </a:p>
@@ -19719,7 +19692,7 @@
                 <a:ea typeface="Calibri" pitchFamily="34" charset="-122"/>
                 <a:cs typeface="Calibri" pitchFamily="34" charset="-120"/>
               </a:rPr>
-              <a:t>across, through</a:t>
+              <a:t>together, with</a:t>
             </a:r>
             <a:endParaRPr lang="en-US" sz="850" dirty="0"/>
           </a:p>
@@ -19727,7 +19700,46 @@
       </p:sp>
       <p:sp>
         <p:nvSpPr>
-          <p:cNvPr id="19" name="Shape 17"/>
+          <p:cNvPr id="19" name="Text 17"/>
+          <p:cNvSpPr/>
+          <p:nvPr/>
+        </p:nvSpPr>
+        <p:spPr>
+          <a:xfrm>
+            <a:off x="2938272" y="2752344"/>
+            <a:ext cx="1828800" cy="182880"/>
+          </a:xfrm>
+          <a:prstGeom prst="rect">
+            <a:avLst/>
+          </a:prstGeom>
+          <a:noFill/>
+          <a:ln/>
+        </p:spPr>
+        <p:txBody>
+          <a:bodyPr wrap="square" lIns="0" tIns="0" rIns="0" bIns="0" rtlCol="0" anchor="t"/>
+          <a:lstStyle/>
+          <a:p>
+            <a:pPr algn="ctr" indent="0" marL="0">
+              <a:buNone/>
+            </a:pPr>
+            <a:r>
+              <a:rPr lang="en-US" sz="700" i="1" dirty="0">
+                <a:solidFill>
+                  <a:srgbClr val="94A3B8"/>
+                </a:solidFill>
+                <a:latin typeface="Calibri" pitchFamily="34" charset="0"/>
+                <a:ea typeface="Calibri" pitchFamily="34" charset="-122"/>
+                <a:cs typeface="Calibri" pitchFamily="34" charset="-120"/>
+              </a:rPr>
+              <a:t>con → com before 'm'</a:t>
+            </a:r>
+            <a:endParaRPr lang="en-US" sz="700" dirty="0"/>
+          </a:p>
+        </p:txBody>
+      </p:sp>
+      <p:sp>
+        <p:nvSpPr>
+          <p:cNvPr id="20" name="Shape 18"/>
           <p:cNvSpPr/>
           <p:nvPr/>
         </p:nvSpPr>
@@ -19761,7 +19773,7 @@
       </p:sp>
       <p:sp>
         <p:nvSpPr>
-          <p:cNvPr id="20" name="Text 18"/>
+          <p:cNvPr id="21" name="Text 19"/>
           <p:cNvSpPr/>
           <p:nvPr/>
         </p:nvSpPr>
@@ -19800,7 +19812,7 @@
       </p:sp>
       <p:sp>
         <p:nvSpPr>
-          <p:cNvPr id="21" name="Text 19"/>
+          <p:cNvPr id="22" name="Text 20"/>
           <p:cNvSpPr/>
           <p:nvPr/>
         </p:nvSpPr>
@@ -19831,7 +19843,7 @@
                 <a:ea typeface="Calibri" pitchFamily="34" charset="-122"/>
                 <a:cs typeface="Calibri" pitchFamily="34" charset="-120"/>
               </a:rPr>
-              <a:t>send, let go</a:t>
+              <a:t>send</a:t>
             </a:r>
             <a:endParaRPr lang="en-US" sz="850" dirty="0"/>
           </a:p>
@@ -19839,7 +19851,7 @@
       </p:sp>
       <p:sp>
         <p:nvSpPr>
-          <p:cNvPr id="22" name="Shape 20"/>
+          <p:cNvPr id="23" name="Shape 21"/>
           <p:cNvSpPr/>
           <p:nvPr/>
         </p:nvSpPr>
@@ -19866,7 +19878,7 @@
       </p:sp>
       <p:sp>
         <p:nvSpPr>
-          <p:cNvPr id="23" name="Text 21"/>
+          <p:cNvPr id="24" name="Text 22"/>
           <p:cNvSpPr/>
           <p:nvPr/>
         </p:nvSpPr>
@@ -19905,7 +19917,7 @@
       </p:sp>
       <p:sp>
         <p:nvSpPr>
-          <p:cNvPr id="24" name="Shape 22"/>
+          <p:cNvPr id="25" name="Shape 23"/>
           <p:cNvSpPr/>
           <p:nvPr/>
         </p:nvSpPr>
@@ -19932,7 +19944,7 @@
       </p:sp>
       <p:sp>
         <p:nvSpPr>
-          <p:cNvPr id="25" name="Shape 23"/>
+          <p:cNvPr id="26" name="Shape 24"/>
           <p:cNvSpPr/>
           <p:nvPr/>
         </p:nvSpPr>
@@ -19959,7 +19971,7 @@
       </p:sp>
       <p:sp>
         <p:nvSpPr>
-          <p:cNvPr id="26" name="Text 24"/>
+          <p:cNvPr id="27" name="Text 25"/>
           <p:cNvSpPr/>
           <p:nvPr/>
         </p:nvSpPr>
@@ -19990,7 +20002,7 @@
                 <a:ea typeface="Trebuchet MS" pitchFamily="34" charset="-122"/>
                 <a:cs typeface="Trebuchet MS" pitchFamily="34" charset="-120"/>
               </a:rPr>
-              <a:t>trans</a:t>
+              <a:t>com</a:t>
             </a:r>
             <a:endParaRPr lang="en-US" sz="1400" dirty="0"/>
           </a:p>
@@ -19998,7 +20010,7 @@
       </p:sp>
       <p:sp>
         <p:nvSpPr>
-          <p:cNvPr id="27" name="Text 25"/>
+          <p:cNvPr id="28" name="Text 26"/>
           <p:cNvSpPr/>
           <p:nvPr/>
         </p:nvSpPr>
@@ -20037,7 +20049,7 @@
       </p:sp>
       <p:sp>
         <p:nvSpPr>
-          <p:cNvPr id="28" name="Shape 26"/>
+          <p:cNvPr id="29" name="Shape 27"/>
           <p:cNvSpPr/>
           <p:nvPr/>
         </p:nvSpPr>
@@ -20064,7 +20076,7 @@
       </p:sp>
       <p:sp>
         <p:nvSpPr>
-          <p:cNvPr id="29" name="Text 27"/>
+          <p:cNvPr id="30" name="Text 28"/>
           <p:cNvSpPr/>
           <p:nvPr/>
         </p:nvSpPr>
@@ -20103,7 +20115,7 @@
       </p:sp>
       <p:sp>
         <p:nvSpPr>
-          <p:cNvPr id="30" name="Shape 28"/>
+          <p:cNvPr id="31" name="Shape 29"/>
           <p:cNvSpPr/>
           <p:nvPr/>
         </p:nvSpPr>
@@ -20130,7 +20142,7 @@
       </p:sp>
       <p:sp>
         <p:nvSpPr>
-          <p:cNvPr id="31" name="Text 29"/>
+          <p:cNvPr id="32" name="Text 30"/>
           <p:cNvSpPr/>
           <p:nvPr/>
         </p:nvSpPr>
@@ -20169,7 +20181,7 @@
       </p:sp>
       <p:sp>
         <p:nvSpPr>
-          <p:cNvPr id="32" name="Shape 30"/>
+          <p:cNvPr id="33" name="Shape 31"/>
           <p:cNvSpPr/>
           <p:nvPr/>
         </p:nvSpPr>
@@ -20196,7 +20208,7 @@
       </p:sp>
       <p:sp>
         <p:nvSpPr>
-          <p:cNvPr id="33" name="Text 31"/>
+          <p:cNvPr id="34" name="Text 32"/>
           <p:cNvSpPr/>
           <p:nvPr/>
         </p:nvSpPr>
@@ -20658,7 +20670,7 @@
                 <a:ea typeface="Trebuchet MS" pitchFamily="34" charset="-122"/>
                 <a:cs typeface="Trebuchet MS" pitchFamily="34" charset="-120"/>
               </a:rPr>
-              <a:t>transmit</a:t>
+              <a:t>commit</a:t>
             </a:r>
             <a:endParaRPr lang="en-US" sz="2800" dirty="0"/>
           </a:p>
@@ -20797,7 +20809,7 @@
                 <a:ea typeface="Trebuchet MS" pitchFamily="34" charset="-122"/>
                 <a:cs typeface="Trebuchet MS" pitchFamily="34" charset="-120"/>
               </a:rPr>
-              <a:t>trans</a:t>
+              <a:t>com</a:t>
             </a:r>
             <a:endParaRPr lang="en-US" sz="1300" dirty="0"/>
           </a:p>
@@ -20836,7 +20848,7 @@
                 <a:ea typeface="Calibri" pitchFamily="34" charset="-122"/>
                 <a:cs typeface="Calibri" pitchFamily="34" charset="-120"/>
               </a:rPr>
-              <a:t>across, through</a:t>
+              <a:t>together, with</a:t>
             </a:r>
             <a:endParaRPr lang="en-US" sz="850" dirty="0"/>
           </a:p>
@@ -20844,7 +20856,46 @@
       </p:sp>
       <p:sp>
         <p:nvSpPr>
-          <p:cNvPr id="19" name="Shape 17"/>
+          <p:cNvPr id="19" name="Text 17"/>
+          <p:cNvSpPr/>
+          <p:nvPr/>
+        </p:nvSpPr>
+        <p:spPr>
+          <a:xfrm>
+            <a:off x="2938272" y="2752344"/>
+            <a:ext cx="1828800" cy="182880"/>
+          </a:xfrm>
+          <a:prstGeom prst="rect">
+            <a:avLst/>
+          </a:prstGeom>
+          <a:noFill/>
+          <a:ln/>
+        </p:spPr>
+        <p:txBody>
+          <a:bodyPr wrap="square" lIns="0" tIns="0" rIns="0" bIns="0" rtlCol="0" anchor="t"/>
+          <a:lstStyle/>
+          <a:p>
+            <a:pPr algn="ctr" indent="0" marL="0">
+              <a:buNone/>
+            </a:pPr>
+            <a:r>
+              <a:rPr lang="en-US" sz="700" i="1" dirty="0">
+                <a:solidFill>
+                  <a:srgbClr val="94A3B8"/>
+                </a:solidFill>
+                <a:latin typeface="Calibri" pitchFamily="34" charset="0"/>
+                <a:ea typeface="Calibri" pitchFamily="34" charset="-122"/>
+                <a:cs typeface="Calibri" pitchFamily="34" charset="-120"/>
+              </a:rPr>
+              <a:t>con → com before 'm'</a:t>
+            </a:r>
+            <a:endParaRPr lang="en-US" sz="700" dirty="0"/>
+          </a:p>
+        </p:txBody>
+      </p:sp>
+      <p:sp>
+        <p:nvSpPr>
+          <p:cNvPr id="20" name="Shape 18"/>
           <p:cNvSpPr/>
           <p:nvPr/>
         </p:nvSpPr>
@@ -20878,7 +20929,7 @@
       </p:sp>
       <p:sp>
         <p:nvSpPr>
-          <p:cNvPr id="20" name="Text 18"/>
+          <p:cNvPr id="21" name="Text 19"/>
           <p:cNvSpPr/>
           <p:nvPr/>
         </p:nvSpPr>
@@ -20917,7 +20968,7 @@
       </p:sp>
       <p:sp>
         <p:nvSpPr>
-          <p:cNvPr id="21" name="Text 19"/>
+          <p:cNvPr id="22" name="Text 20"/>
           <p:cNvSpPr/>
           <p:nvPr/>
         </p:nvSpPr>
@@ -20948,7 +20999,7 @@
                 <a:ea typeface="Calibri" pitchFamily="34" charset="-122"/>
                 <a:cs typeface="Calibri" pitchFamily="34" charset="-120"/>
               </a:rPr>
-              <a:t>send, let go</a:t>
+              <a:t>send</a:t>
             </a:r>
             <a:endParaRPr lang="en-US" sz="850" dirty="0"/>
           </a:p>
@@ -20956,7 +21007,7 @@
       </p:sp>
       <p:sp>
         <p:nvSpPr>
-          <p:cNvPr id="22" name="Shape 20"/>
+          <p:cNvPr id="23" name="Shape 21"/>
           <p:cNvSpPr/>
           <p:nvPr/>
         </p:nvSpPr>
@@ -20983,7 +21034,7 @@
       </p:sp>
       <p:sp>
         <p:nvSpPr>
-          <p:cNvPr id="23" name="Text 21"/>
+          <p:cNvPr id="24" name="Text 22"/>
           <p:cNvSpPr/>
           <p:nvPr/>
         </p:nvSpPr>
@@ -21022,7 +21073,7 @@
       </p:sp>
       <p:sp>
         <p:nvSpPr>
-          <p:cNvPr id="24" name="Shape 22"/>
+          <p:cNvPr id="25" name="Shape 23"/>
           <p:cNvSpPr/>
           <p:nvPr/>
         </p:nvSpPr>
@@ -21049,7 +21100,7 @@
       </p:sp>
       <p:sp>
         <p:nvSpPr>
-          <p:cNvPr id="25" name="Shape 23"/>
+          <p:cNvPr id="26" name="Shape 24"/>
           <p:cNvSpPr/>
           <p:nvPr/>
         </p:nvSpPr>
@@ -21076,7 +21127,7 @@
       </p:sp>
       <p:sp>
         <p:nvSpPr>
-          <p:cNvPr id="26" name="Text 24"/>
+          <p:cNvPr id="27" name="Text 25"/>
           <p:cNvSpPr/>
           <p:nvPr/>
         </p:nvSpPr>
@@ -21107,7 +21158,7 @@
                 <a:ea typeface="Trebuchet MS" pitchFamily="34" charset="-122"/>
                 <a:cs typeface="Trebuchet MS" pitchFamily="34" charset="-120"/>
               </a:rPr>
-              <a:t>trans</a:t>
+              <a:t>com</a:t>
             </a:r>
             <a:endParaRPr lang="en-US" sz="1400" dirty="0"/>
           </a:p>
@@ -21115,7 +21166,7 @@
       </p:sp>
       <p:sp>
         <p:nvSpPr>
-          <p:cNvPr id="27" name="Text 25"/>
+          <p:cNvPr id="28" name="Text 26"/>
           <p:cNvSpPr/>
           <p:nvPr/>
         </p:nvSpPr>
@@ -21154,7 +21205,7 @@
       </p:sp>
       <p:sp>
         <p:nvSpPr>
-          <p:cNvPr id="28" name="Shape 26"/>
+          <p:cNvPr id="29" name="Shape 27"/>
           <p:cNvSpPr/>
           <p:nvPr/>
         </p:nvSpPr>
@@ -21181,7 +21232,7 @@
       </p:sp>
       <p:sp>
         <p:nvSpPr>
-          <p:cNvPr id="29" name="Text 27"/>
+          <p:cNvPr id="30" name="Text 28"/>
           <p:cNvSpPr/>
           <p:nvPr/>
         </p:nvSpPr>
@@ -21220,7 +21271,7 @@
       </p:sp>
       <p:sp>
         <p:nvSpPr>
-          <p:cNvPr id="30" name="Shape 28"/>
+          <p:cNvPr id="31" name="Shape 29"/>
           <p:cNvSpPr/>
           <p:nvPr/>
         </p:nvSpPr>
@@ -21247,7 +21298,7 @@
       </p:sp>
       <p:sp>
         <p:nvSpPr>
-          <p:cNvPr id="31" name="Text 29"/>
+          <p:cNvPr id="32" name="Text 30"/>
           <p:cNvSpPr/>
           <p:nvPr/>
         </p:nvSpPr>
@@ -21286,18 +21337,18 @@
       </p:sp>
       <p:sp>
         <p:nvSpPr>
-          <p:cNvPr id="32" name="Shape 30"/>
+          <p:cNvPr id="33" name="Shape 31"/>
           <p:cNvSpPr/>
           <p:nvPr/>
         </p:nvSpPr>
         <p:spPr>
           <a:xfrm>
             <a:off x="1874520" y="4096512"/>
-            <a:ext cx="6903720" cy="658368"/>
+            <a:ext cx="6903720" cy="804672"/>
           </a:xfrm>
           <a:prstGeom prst="rect">
             <a:avLst>
-              <a:gd name="adj" fmla="val 8333"/>
+              <a:gd name="adj" fmla="val 6818"/>
             </a:avLst>
           </a:prstGeom>
           <a:solidFill>
@@ -21313,18 +21364,18 @@
       </p:sp>
       <p:sp>
         <p:nvSpPr>
-          <p:cNvPr id="33" name="Shape 31"/>
-          <p:cNvSpPr/>
-          <p:nvPr/>
-        </p:nvSpPr>
-        <p:spPr>
-          <a:xfrm>
-            <a:off x="2023872" y="4169664"/>
-            <a:ext cx="685800" cy="475488"/>
+          <p:cNvPr id="34" name="Shape 32"/>
+          <p:cNvSpPr/>
+          <p:nvPr/>
+        </p:nvSpPr>
+        <p:spPr>
+          <a:xfrm>
+            <a:off x="2427732" y="4169664"/>
+            <a:ext cx="685800" cy="384048"/>
           </a:xfrm>
           <a:prstGeom prst="rect">
             <a:avLst>
-              <a:gd name="adj" fmla="val 7692"/>
+              <a:gd name="adj" fmla="val 9524"/>
             </a:avLst>
           </a:prstGeom>
           <a:solidFill>
@@ -21340,14 +21391,14 @@
       </p:sp>
       <p:sp>
         <p:nvSpPr>
-          <p:cNvPr id="34" name="Text 32"/>
-          <p:cNvSpPr/>
-          <p:nvPr/>
-        </p:nvSpPr>
-        <p:spPr>
-          <a:xfrm>
-            <a:off x="2023872" y="4169664"/>
-            <a:ext cx="685800" cy="475488"/>
+          <p:cNvPr id="35" name="Text 33"/>
+          <p:cNvSpPr/>
+          <p:nvPr/>
+        </p:nvSpPr>
+        <p:spPr>
+          <a:xfrm>
+            <a:off x="2427732" y="4169664"/>
+            <a:ext cx="685800" cy="384048"/>
           </a:xfrm>
           <a:prstGeom prst="rect">
             <a:avLst/>
@@ -21371,7 +21422,7 @@
                 <a:ea typeface="Trebuchet MS" pitchFamily="34" charset="-122"/>
                 <a:cs typeface="Trebuchet MS" pitchFamily="34" charset="-120"/>
               </a:rPr>
-              <a:t>t</a:t>
+              <a:t>c</a:t>
             </a:r>
             <a:endParaRPr lang="en-US" sz="900" dirty="0"/>
           </a:p>
@@ -21379,18 +21430,57 @@
       </p:sp>
       <p:sp>
         <p:nvSpPr>
-          <p:cNvPr id="35" name="Shape 33"/>
-          <p:cNvSpPr/>
-          <p:nvPr/>
-        </p:nvSpPr>
-        <p:spPr>
-          <a:xfrm>
-            <a:off x="2831592" y="4169664"/>
-            <a:ext cx="685800" cy="475488"/>
+          <p:cNvPr id="36" name="Text 34"/>
+          <p:cNvSpPr/>
+          <p:nvPr/>
+        </p:nvSpPr>
+        <p:spPr>
+          <a:xfrm>
+            <a:off x="2427732" y="4572000"/>
+            <a:ext cx="685800" cy="219456"/>
+          </a:xfrm>
+          <a:prstGeom prst="rect">
+            <a:avLst/>
+          </a:prstGeom>
+          <a:noFill/>
+          <a:ln/>
+        </p:spPr>
+        <p:txBody>
+          <a:bodyPr wrap="square" lIns="0" tIns="0" rIns="0" bIns="0" rtlCol="0" anchor="t"/>
+          <a:lstStyle/>
+          <a:p>
+            <a:pPr algn="ctr" indent="0" marL="0">
+              <a:buNone/>
+            </a:pPr>
+            <a:r>
+              <a:rPr lang="en-US" sz="750" i="1" dirty="0">
+                <a:solidFill>
+                  <a:srgbClr val="94A3B8"/>
+                </a:solidFill>
+                <a:latin typeface="Calibri" pitchFamily="34" charset="0"/>
+                <a:ea typeface="Calibri" pitchFamily="34" charset="-122"/>
+                <a:cs typeface="Calibri" pitchFamily="34" charset="-120"/>
+              </a:rPr>
+              <a:t>/k/</a:t>
+            </a:r>
+            <a:endParaRPr lang="en-US" sz="750" dirty="0"/>
+          </a:p>
+        </p:txBody>
+      </p:sp>
+      <p:sp>
+        <p:nvSpPr>
+          <p:cNvPr id="37" name="Shape 35"/>
+          <p:cNvSpPr/>
+          <p:nvPr/>
+        </p:nvSpPr>
+        <p:spPr>
+          <a:xfrm>
+            <a:off x="3639312" y="4169664"/>
+            <a:ext cx="685800" cy="384048"/>
           </a:xfrm>
           <a:prstGeom prst="rect">
             <a:avLst>
-              <a:gd name="adj" fmla="val 7692"/>
+              <a:gd name="adj" fmla="val 9524"/>
             </a:avLst>
           </a:prstGeom>
           <a:solidFill>
@@ -21406,14 +21496,14 @@
       </p:sp>
       <p:sp>
         <p:nvSpPr>
-          <p:cNvPr id="36" name="Text 34"/>
-          <p:cNvSpPr/>
-          <p:nvPr/>
-        </p:nvSpPr>
-        <p:spPr>
-          <a:xfrm>
-            <a:off x="2831592" y="4169664"/>
-            <a:ext cx="685800" cy="475488"/>
+          <p:cNvPr id="38" name="Text 36"/>
+          <p:cNvSpPr/>
+          <p:nvPr/>
+        </p:nvSpPr>
+        <p:spPr>
+          <a:xfrm>
+            <a:off x="3639312" y="4169664"/>
+            <a:ext cx="685800" cy="384048"/>
           </a:xfrm>
           <a:prstGeom prst="rect">
             <a:avLst/>
@@ -21437,7 +21527,7 @@
                 <a:ea typeface="Trebuchet MS" pitchFamily="34" charset="-122"/>
                 <a:cs typeface="Trebuchet MS" pitchFamily="34" charset="-120"/>
               </a:rPr>
-              <a:t>r</a:t>
+              <a:t>o</a:t>
             </a:r>
             <a:endParaRPr lang="en-US" sz="900" dirty="0"/>
           </a:p>
@@ -21445,18 +21535,18 @@
       </p:sp>
       <p:sp>
         <p:nvSpPr>
-          <p:cNvPr id="37" name="Shape 35"/>
-          <p:cNvSpPr/>
-          <p:nvPr/>
-        </p:nvSpPr>
-        <p:spPr>
-          <a:xfrm>
-            <a:off x="3639312" y="4169664"/>
-            <a:ext cx="685800" cy="475488"/>
+          <p:cNvPr id="39" name="Shape 37"/>
+          <p:cNvSpPr/>
+          <p:nvPr/>
+        </p:nvSpPr>
+        <p:spPr>
+          <a:xfrm>
+            <a:off x="4850892" y="4169664"/>
+            <a:ext cx="685800" cy="384048"/>
           </a:xfrm>
           <a:prstGeom prst="rect">
             <a:avLst>
-              <a:gd name="adj" fmla="val 7692"/>
+              <a:gd name="adj" fmla="val 9524"/>
             </a:avLst>
           </a:prstGeom>
           <a:solidFill>
@@ -21472,14 +21562,14 @@
       </p:sp>
       <p:sp>
         <p:nvSpPr>
-          <p:cNvPr id="38" name="Text 36"/>
-          <p:cNvSpPr/>
-          <p:nvPr/>
-        </p:nvSpPr>
-        <p:spPr>
-          <a:xfrm>
-            <a:off x="3639312" y="4169664"/>
-            <a:ext cx="685800" cy="475488"/>
+          <p:cNvPr id="40" name="Text 38"/>
+          <p:cNvSpPr/>
+          <p:nvPr/>
+        </p:nvSpPr>
+        <p:spPr>
+          <a:xfrm>
+            <a:off x="4850892" y="4169664"/>
+            <a:ext cx="685800" cy="384048"/>
           </a:xfrm>
           <a:prstGeom prst="rect">
             <a:avLst/>
@@ -21503,7 +21593,7 @@
                 <a:ea typeface="Trebuchet MS" pitchFamily="34" charset="-122"/>
                 <a:cs typeface="Trebuchet MS" pitchFamily="34" charset="-120"/>
               </a:rPr>
-              <a:t>a</a:t>
+              <a:t>mm</a:t>
             </a:r>
             <a:endParaRPr lang="en-US" sz="900" dirty="0"/>
           </a:p>
@@ -21511,18 +21601,18 @@
       </p:sp>
       <p:sp>
         <p:nvSpPr>
-          <p:cNvPr id="39" name="Shape 37"/>
-          <p:cNvSpPr/>
-          <p:nvPr/>
-        </p:nvSpPr>
-        <p:spPr>
-          <a:xfrm>
-            <a:off x="4447032" y="4169664"/>
-            <a:ext cx="685800" cy="475488"/>
+          <p:cNvPr id="41" name="Shape 39"/>
+          <p:cNvSpPr/>
+          <p:nvPr/>
+        </p:nvSpPr>
+        <p:spPr>
+          <a:xfrm>
+            <a:off x="6062472" y="4169664"/>
+            <a:ext cx="685800" cy="384048"/>
           </a:xfrm>
           <a:prstGeom prst="rect">
             <a:avLst>
-              <a:gd name="adj" fmla="val 7692"/>
+              <a:gd name="adj" fmla="val 9524"/>
             </a:avLst>
           </a:prstGeom>
           <a:solidFill>
@@ -21538,14 +21628,14 @@
       </p:sp>
       <p:sp>
         <p:nvSpPr>
-          <p:cNvPr id="40" name="Text 38"/>
-          <p:cNvSpPr/>
-          <p:nvPr/>
-        </p:nvSpPr>
-        <p:spPr>
-          <a:xfrm>
-            <a:off x="4447032" y="4169664"/>
-            <a:ext cx="685800" cy="475488"/>
+          <p:cNvPr id="42" name="Text 40"/>
+          <p:cNvSpPr/>
+          <p:nvPr/>
+        </p:nvSpPr>
+        <p:spPr>
+          <a:xfrm>
+            <a:off x="6062472" y="4169664"/>
+            <a:ext cx="685800" cy="384048"/>
           </a:xfrm>
           <a:prstGeom prst="rect">
             <a:avLst/>
@@ -21569,7 +21659,7 @@
                 <a:ea typeface="Trebuchet MS" pitchFamily="34" charset="-122"/>
                 <a:cs typeface="Trebuchet MS" pitchFamily="34" charset="-120"/>
               </a:rPr>
-              <a:t>n</a:t>
+              <a:t>i</a:t>
             </a:r>
             <a:endParaRPr lang="en-US" sz="900" dirty="0"/>
           </a:p>
@@ -21577,18 +21667,18 @@
       </p:sp>
       <p:sp>
         <p:nvSpPr>
-          <p:cNvPr id="41" name="Shape 39"/>
-          <p:cNvSpPr/>
-          <p:nvPr/>
-        </p:nvSpPr>
-        <p:spPr>
-          <a:xfrm>
-            <a:off x="5254752" y="4169664"/>
-            <a:ext cx="685800" cy="475488"/>
+          <p:cNvPr id="43" name="Shape 41"/>
+          <p:cNvSpPr/>
+          <p:nvPr/>
+        </p:nvSpPr>
+        <p:spPr>
+          <a:xfrm>
+            <a:off x="7274052" y="4169664"/>
+            <a:ext cx="685800" cy="384048"/>
           </a:xfrm>
           <a:prstGeom prst="rect">
             <a:avLst>
-              <a:gd name="adj" fmla="val 7692"/>
+              <a:gd name="adj" fmla="val 9524"/>
             </a:avLst>
           </a:prstGeom>
           <a:solidFill>
@@ -21604,212 +21694,14 @@
       </p:sp>
       <p:sp>
         <p:nvSpPr>
-          <p:cNvPr id="42" name="Text 40"/>
-          <p:cNvSpPr/>
-          <p:nvPr/>
-        </p:nvSpPr>
-        <p:spPr>
-          <a:xfrm>
-            <a:off x="5254752" y="4169664"/>
-            <a:ext cx="685800" cy="475488"/>
-          </a:xfrm>
-          <a:prstGeom prst="rect">
-            <a:avLst/>
-          </a:prstGeom>
-          <a:noFill/>
-          <a:ln/>
-        </p:spPr>
-        <p:txBody>
-          <a:bodyPr wrap="square" lIns="0" tIns="0" rIns="0" bIns="0" rtlCol="0" anchor="ctr"/>
-          <a:lstStyle/>
-          <a:p>
-            <a:pPr algn="ctr" indent="0" marL="0">
-              <a:buNone/>
-            </a:pPr>
-            <a:r>
-              <a:rPr lang="en-US" sz="900" b="1" dirty="0">
-                <a:solidFill>
-                  <a:srgbClr val="9D174D"/>
-                </a:solidFill>
-                <a:latin typeface="Trebuchet MS" pitchFamily="34" charset="0"/>
-                <a:ea typeface="Trebuchet MS" pitchFamily="34" charset="-122"/>
-                <a:cs typeface="Trebuchet MS" pitchFamily="34" charset="-120"/>
-              </a:rPr>
-              <a:t>s</a:t>
-            </a:r>
-            <a:endParaRPr lang="en-US" sz="900" dirty="0"/>
-          </a:p>
-        </p:txBody>
-      </p:sp>
-      <p:sp>
-        <p:nvSpPr>
-          <p:cNvPr id="43" name="Shape 41"/>
-          <p:cNvSpPr/>
-          <p:nvPr/>
-        </p:nvSpPr>
-        <p:spPr>
-          <a:xfrm>
-            <a:off x="6062472" y="4169664"/>
-            <a:ext cx="685800" cy="475488"/>
-          </a:xfrm>
-          <a:prstGeom prst="rect">
-            <a:avLst>
-              <a:gd name="adj" fmla="val 7692"/>
-            </a:avLst>
-          </a:prstGeom>
-          <a:solidFill>
-            <a:srgbClr val="FFFFFF"/>
-          </a:solidFill>
-          <a:ln w="12700">
-            <a:solidFill>
-              <a:srgbClr val="DB2777"/>
-            </a:solidFill>
-            <a:prstDash val="solid"/>
-          </a:ln>
-        </p:spPr>
-      </p:sp>
-      <p:sp>
-        <p:nvSpPr>
           <p:cNvPr id="44" name="Text 42"/>
           <p:cNvSpPr/>
           <p:nvPr/>
         </p:nvSpPr>
         <p:spPr>
           <a:xfrm>
-            <a:off x="6062472" y="4169664"/>
-            <a:ext cx="685800" cy="475488"/>
-          </a:xfrm>
-          <a:prstGeom prst="rect">
-            <a:avLst/>
-          </a:prstGeom>
-          <a:noFill/>
-          <a:ln/>
-        </p:spPr>
-        <p:txBody>
-          <a:bodyPr wrap="square" lIns="0" tIns="0" rIns="0" bIns="0" rtlCol="0" anchor="ctr"/>
-          <a:lstStyle/>
-          <a:p>
-            <a:pPr algn="ctr" indent="0" marL="0">
-              <a:buNone/>
-            </a:pPr>
-            <a:r>
-              <a:rPr lang="en-US" sz="900" b="1" dirty="0">
-                <a:solidFill>
-                  <a:srgbClr val="9D174D"/>
-                </a:solidFill>
-                <a:latin typeface="Trebuchet MS" pitchFamily="34" charset="0"/>
-                <a:ea typeface="Trebuchet MS" pitchFamily="34" charset="-122"/>
-                <a:cs typeface="Trebuchet MS" pitchFamily="34" charset="-120"/>
-              </a:rPr>
-              <a:t>m</a:t>
-            </a:r>
-            <a:endParaRPr lang="en-US" sz="900" dirty="0"/>
-          </a:p>
-        </p:txBody>
-      </p:sp>
-      <p:sp>
-        <p:nvSpPr>
-          <p:cNvPr id="45" name="Shape 43"/>
-          <p:cNvSpPr/>
-          <p:nvPr/>
-        </p:nvSpPr>
-        <p:spPr>
-          <a:xfrm>
-            <a:off x="6870192" y="4169664"/>
-            <a:ext cx="685800" cy="475488"/>
-          </a:xfrm>
-          <a:prstGeom prst="rect">
-            <a:avLst>
-              <a:gd name="adj" fmla="val 7692"/>
-            </a:avLst>
-          </a:prstGeom>
-          <a:solidFill>
-            <a:srgbClr val="FFFFFF"/>
-          </a:solidFill>
-          <a:ln w="12700">
-            <a:solidFill>
-              <a:srgbClr val="DB2777"/>
-            </a:solidFill>
-            <a:prstDash val="solid"/>
-          </a:ln>
-        </p:spPr>
-      </p:sp>
-      <p:sp>
-        <p:nvSpPr>
-          <p:cNvPr id="46" name="Text 44"/>
-          <p:cNvSpPr/>
-          <p:nvPr/>
-        </p:nvSpPr>
-        <p:spPr>
-          <a:xfrm>
-            <a:off x="6870192" y="4169664"/>
-            <a:ext cx="685800" cy="475488"/>
-          </a:xfrm>
-          <a:prstGeom prst="rect">
-            <a:avLst/>
-          </a:prstGeom>
-          <a:noFill/>
-          <a:ln/>
-        </p:spPr>
-        <p:txBody>
-          <a:bodyPr wrap="square" lIns="0" tIns="0" rIns="0" bIns="0" rtlCol="0" anchor="ctr"/>
-          <a:lstStyle/>
-          <a:p>
-            <a:pPr algn="ctr" indent="0" marL="0">
-              <a:buNone/>
-            </a:pPr>
-            <a:r>
-              <a:rPr lang="en-US" sz="900" b="1" dirty="0">
-                <a:solidFill>
-                  <a:srgbClr val="9D174D"/>
-                </a:solidFill>
-                <a:latin typeface="Trebuchet MS" pitchFamily="34" charset="0"/>
-                <a:ea typeface="Trebuchet MS" pitchFamily="34" charset="-122"/>
-                <a:cs typeface="Trebuchet MS" pitchFamily="34" charset="-120"/>
-              </a:rPr>
-              <a:t>i</a:t>
-            </a:r>
-            <a:endParaRPr lang="en-US" sz="900" dirty="0"/>
-          </a:p>
-        </p:txBody>
-      </p:sp>
-      <p:sp>
-        <p:nvSpPr>
-          <p:cNvPr id="47" name="Shape 45"/>
-          <p:cNvSpPr/>
-          <p:nvPr/>
-        </p:nvSpPr>
-        <p:spPr>
-          <a:xfrm>
-            <a:off x="7677912" y="4169664"/>
-            <a:ext cx="685800" cy="475488"/>
-          </a:xfrm>
-          <a:prstGeom prst="rect">
-            <a:avLst>
-              <a:gd name="adj" fmla="val 7692"/>
-            </a:avLst>
-          </a:prstGeom>
-          <a:solidFill>
-            <a:srgbClr val="FFFFFF"/>
-          </a:solidFill>
-          <a:ln w="12700">
-            <a:solidFill>
-              <a:srgbClr val="DB2777"/>
-            </a:solidFill>
-            <a:prstDash val="solid"/>
-          </a:ln>
-        </p:spPr>
-      </p:sp>
-      <p:sp>
-        <p:nvSpPr>
-          <p:cNvPr id="48" name="Text 46"/>
-          <p:cNvSpPr/>
-          <p:nvPr/>
-        </p:nvSpPr>
-        <p:spPr>
-          <a:xfrm>
-            <a:off x="7677912" y="4169664"/>
-            <a:ext cx="685800" cy="475488"/>
+            <a:off x="7274052" y="4169664"/>
+            <a:ext cx="685800" cy="384048"/>
           </a:xfrm>
           <a:prstGeom prst="rect">
             <a:avLst/>
@@ -23269,7 +23161,7 @@
                 <a:ea typeface="Calibri" pitchFamily="34" charset="-122"/>
                 <a:cs typeface="Calibri" pitchFamily="34" charset="-120"/>
               </a:rPr>
-              <a:t>to, toward</a:t>
+              <a:t>to, towards</a:t>
             </a:r>
             <a:endParaRPr lang="en-US" sz="850" dirty="0"/>
           </a:p>
@@ -23381,7 +23273,7 @@
                 <a:ea typeface="Calibri" pitchFamily="34" charset="-122"/>
                 <a:cs typeface="Calibri" pitchFamily="34" charset="-120"/>
               </a:rPr>
-              <a:t>send, let go</a:t>
+              <a:t>send</a:t>
             </a:r>
             <a:endParaRPr lang="en-US" sz="850" dirty="0"/>
           </a:p>
@@ -24973,7 +24865,7 @@
                 <a:ea typeface="Calibri" pitchFamily="34" charset="-122"/>
                 <a:cs typeface="Calibri" pitchFamily="34" charset="-120"/>
               </a:rPr>
-              <a:t>to, toward</a:t>
+              <a:t>to, towards</a:t>
             </a:r>
             <a:endParaRPr lang="en-US" sz="850" dirty="0"/>
           </a:p>
@@ -25085,7 +24977,7 @@
                 <a:ea typeface="Calibri" pitchFamily="34" charset="-122"/>
                 <a:cs typeface="Calibri" pitchFamily="34" charset="-120"/>
               </a:rPr>
-              <a:t>send, let go</a:t>
+              <a:t>send</a:t>
             </a:r>
             <a:endParaRPr lang="en-US" sz="850" dirty="0"/>
           </a:p>
@@ -26090,7 +25982,7 @@
                 <a:ea typeface="Calibri" pitchFamily="34" charset="-122"/>
                 <a:cs typeface="Calibri" pitchFamily="34" charset="-120"/>
               </a:rPr>
-              <a:t>to, toward</a:t>
+              <a:t>to, towards</a:t>
             </a:r>
             <a:endParaRPr lang="en-US" sz="850" dirty="0"/>
           </a:p>
@@ -26202,7 +26094,7 @@
                 <a:ea typeface="Calibri" pitchFamily="34" charset="-122"/>
                 <a:cs typeface="Calibri" pitchFamily="34" charset="-120"/>
               </a:rPr>
-              <a:t>send, let go</a:t>
+              <a:t>send</a:t>
             </a:r>
             <a:endParaRPr lang="en-US" sz="850" dirty="0"/>
           </a:p>
@@ -27320,7 +27212,7 @@
                 <a:ea typeface="Trebuchet MS" pitchFamily="34" charset="-122"/>
                 <a:cs typeface="Trebuchet MS" pitchFamily="34" charset="-120"/>
               </a:rPr>
-              <a:t>committed</a:t>
+              <a:t>permit</a:t>
             </a:r>
             <a:endParaRPr lang="en-US" sz="2800" dirty="0"/>
           </a:p>
@@ -28147,7 +28039,7 @@
                 <a:ea typeface="Trebuchet MS" pitchFamily="34" charset="-122"/>
                 <a:cs typeface="Trebuchet MS" pitchFamily="34" charset="-120"/>
               </a:rPr>
-              <a:t>committed</a:t>
+              <a:t>permit</a:t>
             </a:r>
             <a:endParaRPr lang="en-US" sz="2800" dirty="0"/>
           </a:p>
@@ -28227,8 +28119,8 @@
         </p:nvSpPr>
         <p:spPr>
           <a:xfrm>
-            <a:off x="1989734" y="2258568"/>
-            <a:ext cx="1581912" cy="292608"/>
+            <a:off x="2938272" y="2258568"/>
+            <a:ext cx="1828800" cy="292608"/>
           </a:xfrm>
           <a:prstGeom prst="rect">
             <a:avLst>
@@ -28261,8 +28153,8 @@
         </p:nvSpPr>
         <p:spPr>
           <a:xfrm>
-            <a:off x="1989734" y="2258568"/>
-            <a:ext cx="1581912" cy="292608"/>
+            <a:off x="2938272" y="2258568"/>
+            <a:ext cx="1828800" cy="292608"/>
           </a:xfrm>
           <a:prstGeom prst="rect">
             <a:avLst/>
@@ -28286,7 +28178,7 @@
                 <a:ea typeface="Trebuchet MS" pitchFamily="34" charset="-122"/>
                 <a:cs typeface="Trebuchet MS" pitchFamily="34" charset="-120"/>
               </a:rPr>
-              <a:t>com</a:t>
+              <a:t>per</a:t>
             </a:r>
             <a:endParaRPr lang="en-US" sz="1300" dirty="0"/>
           </a:p>
@@ -28300,8 +28192,8 @@
         </p:nvSpPr>
         <p:spPr>
           <a:xfrm>
-            <a:off x="1989734" y="2569464"/>
-            <a:ext cx="1581912" cy="201168"/>
+            <a:off x="2938272" y="2569464"/>
+            <a:ext cx="1828800" cy="201168"/>
           </a:xfrm>
           <a:prstGeom prst="rect">
             <a:avLst/>
@@ -28325,7 +28217,7 @@
                 <a:ea typeface="Calibri" pitchFamily="34" charset="-122"/>
                 <a:cs typeface="Calibri" pitchFamily="34" charset="-120"/>
               </a:rPr>
-              <a:t>together, with</a:t>
+              <a:t>through, thoroughly</a:t>
             </a:r>
             <a:endParaRPr lang="en-US" sz="850" dirty="0"/>
           </a:p>
@@ -28333,53 +28225,14 @@
       </p:sp>
       <p:sp>
         <p:nvSpPr>
-          <p:cNvPr id="19" name="Text 17"/>
-          <p:cNvSpPr/>
-          <p:nvPr/>
-        </p:nvSpPr>
-        <p:spPr>
-          <a:xfrm>
-            <a:off x="1989734" y="2752344"/>
-            <a:ext cx="1581912" cy="182880"/>
-          </a:xfrm>
-          <a:prstGeom prst="rect">
-            <a:avLst/>
-          </a:prstGeom>
-          <a:noFill/>
-          <a:ln/>
-        </p:spPr>
-        <p:txBody>
-          <a:bodyPr wrap="square" lIns="0" tIns="0" rIns="0" bIns="0" rtlCol="0" anchor="t"/>
-          <a:lstStyle/>
-          <a:p>
-            <a:pPr algn="ctr" indent="0" marL="0">
-              <a:buNone/>
-            </a:pPr>
-            <a:r>
-              <a:rPr lang="en-US" sz="700" i="1" dirty="0">
-                <a:solidFill>
-                  <a:srgbClr val="94A3B8"/>
-                </a:solidFill>
-                <a:latin typeface="Calibri" pitchFamily="34" charset="0"/>
-                <a:ea typeface="Calibri" pitchFamily="34" charset="-122"/>
-                <a:cs typeface="Calibri" pitchFamily="34" charset="-120"/>
-              </a:rPr>
-              <a:t>con → com before 'm'</a:t>
-            </a:r>
-            <a:endParaRPr lang="en-US" sz="700" dirty="0"/>
-          </a:p>
-        </p:txBody>
-      </p:sp>
-      <p:sp>
-        <p:nvSpPr>
-          <p:cNvPr id="20" name="Shape 18"/>
-          <p:cNvSpPr/>
-          <p:nvPr/>
-        </p:nvSpPr>
-        <p:spPr>
-          <a:xfrm>
-            <a:off x="3659429" y="2258568"/>
-            <a:ext cx="1581912" cy="292608"/>
+          <p:cNvPr id="19" name="Shape 17"/>
+          <p:cNvSpPr/>
+          <p:nvPr/>
+        </p:nvSpPr>
+        <p:spPr>
+          <a:xfrm>
+            <a:off x="5803392" y="2258568"/>
+            <a:ext cx="1828800" cy="292608"/>
           </a:xfrm>
           <a:prstGeom prst="rect">
             <a:avLst>
@@ -28406,14 +28259,14 @@
       </p:sp>
       <p:sp>
         <p:nvSpPr>
-          <p:cNvPr id="21" name="Text 19"/>
-          <p:cNvSpPr/>
-          <p:nvPr/>
-        </p:nvSpPr>
-        <p:spPr>
-          <a:xfrm>
-            <a:off x="3659429" y="2258568"/>
-            <a:ext cx="1581912" cy="292608"/>
+          <p:cNvPr id="20" name="Text 18"/>
+          <p:cNvSpPr/>
+          <p:nvPr/>
+        </p:nvSpPr>
+        <p:spPr>
+          <a:xfrm>
+            <a:off x="5803392" y="2258568"/>
+            <a:ext cx="1828800" cy="292608"/>
           </a:xfrm>
           <a:prstGeom prst="rect">
             <a:avLst/>
@@ -28445,14 +28298,14 @@
       </p:sp>
       <p:sp>
         <p:nvSpPr>
-          <p:cNvPr id="22" name="Text 20"/>
-          <p:cNvSpPr/>
-          <p:nvPr/>
-        </p:nvSpPr>
-        <p:spPr>
-          <a:xfrm>
-            <a:off x="3659429" y="2569464"/>
-            <a:ext cx="1581912" cy="201168"/>
+          <p:cNvPr id="21" name="Text 19"/>
+          <p:cNvSpPr/>
+          <p:nvPr/>
+        </p:nvSpPr>
+        <p:spPr>
+          <a:xfrm>
+            <a:off x="5803392" y="2569464"/>
+            <a:ext cx="1828800" cy="201168"/>
           </a:xfrm>
           <a:prstGeom prst="rect">
             <a:avLst/>
@@ -28476,7 +28329,7 @@
                 <a:ea typeface="Calibri" pitchFamily="34" charset="-122"/>
                 <a:cs typeface="Calibri" pitchFamily="34" charset="-120"/>
               </a:rPr>
-              <a:t>send, let go</a:t>
+              <a:t>send</a:t>
             </a:r>
             <a:endParaRPr lang="en-US" sz="850" dirty="0"/>
           </a:p>
@@ -28484,48 +28337,41 @@
       </p:sp>
       <p:sp>
         <p:nvSpPr>
-          <p:cNvPr id="23" name="Shape 21"/>
-          <p:cNvSpPr/>
-          <p:nvPr/>
-        </p:nvSpPr>
-        <p:spPr>
-          <a:xfrm>
-            <a:off x="5329123" y="2258568"/>
-            <a:ext cx="1581912" cy="292608"/>
+          <p:cNvPr id="22" name="Shape 20"/>
+          <p:cNvSpPr/>
+          <p:nvPr/>
+        </p:nvSpPr>
+        <p:spPr>
+          <a:xfrm>
+            <a:off x="365760" y="3273552"/>
+            <a:ext cx="1371600" cy="658368"/>
           </a:xfrm>
           <a:prstGeom prst="rect">
             <a:avLst>
-              <a:gd name="adj" fmla="val 25000"/>
+              <a:gd name="adj" fmla="val 8333"/>
             </a:avLst>
           </a:prstGeom>
           <a:solidFill>
-            <a:srgbClr val="FCE7F3"/>
-          </a:solidFill>
-          <a:ln w="19050">
-            <a:solidFill>
-              <a:srgbClr val="DB2777"/>
-            </a:solidFill>
-            <a:prstDash val="solid"/>
-          </a:ln>
-          <a:effectLst>
-            <a:outerShdw sx="100000" sy="100000" kx="0" ky="0" algn="bl" rotWithShape="0" blurRad="101600" dist="38100" dir="8100000">
-              <a:srgbClr val="000000">
-                <a:alpha val="12000"/>
-              </a:srgbClr>
-            </a:outerShdw>
-          </a:effectLst>
-        </p:spPr>
-      </p:sp>
-      <p:sp>
-        <p:nvSpPr>
-          <p:cNvPr id="24" name="Text 22"/>
-          <p:cNvSpPr/>
-          <p:nvPr/>
-        </p:nvSpPr>
-        <p:spPr>
-          <a:xfrm>
-            <a:off x="5329123" y="2258568"/>
-            <a:ext cx="1581912" cy="292608"/>
+            <a:srgbClr val="E2E8F0"/>
+          </a:solidFill>
+          <a:ln w="12700">
+            <a:solidFill>
+              <a:srgbClr val="E2E8F0"/>
+            </a:solidFill>
+            <a:prstDash val="solid"/>
+          </a:ln>
+        </p:spPr>
+      </p:sp>
+      <p:sp>
+        <p:nvSpPr>
+          <p:cNvPr id="23" name="Text 21"/>
+          <p:cNvSpPr/>
+          <p:nvPr/>
+        </p:nvSpPr>
+        <p:spPr>
+          <a:xfrm>
+            <a:off x="365760" y="3273552"/>
+            <a:ext cx="1371600" cy="658368"/>
           </a:xfrm>
           <a:prstGeom prst="rect">
             <a:avLst/>
@@ -28541,19 +28387,46 @@
               <a:buNone/>
             </a:pPr>
             <a:r>
-              <a:rPr lang="en-US" sz="1300" b="1" dirty="0">
-                <a:solidFill>
-                  <a:srgbClr val="9D174D"/>
+              <a:rPr lang="en-US" sz="1100" b="1" dirty="0">
+                <a:solidFill>
+                  <a:srgbClr val="475569"/>
                 </a:solidFill>
                 <a:latin typeface="Trebuchet MS" pitchFamily="34" charset="0"/>
                 <a:ea typeface="Trebuchet MS" pitchFamily="34" charset="-122"/>
                 <a:cs typeface="Trebuchet MS" pitchFamily="34" charset="-120"/>
               </a:rPr>
-              <a:t>t</a:t>
-            </a:r>
-            <a:endParaRPr lang="en-US" sz="1300" dirty="0"/>
-          </a:p>
-        </p:txBody>
+              <a:t>Syllables</a:t>
+            </a:r>
+            <a:endParaRPr lang="en-US" sz="1100" dirty="0"/>
+          </a:p>
+        </p:txBody>
+      </p:sp>
+      <p:sp>
+        <p:nvSpPr>
+          <p:cNvPr id="24" name="Shape 22"/>
+          <p:cNvSpPr/>
+          <p:nvPr/>
+        </p:nvSpPr>
+        <p:spPr>
+          <a:xfrm>
+            <a:off x="1874520" y="3273552"/>
+            <a:ext cx="6903720" cy="658368"/>
+          </a:xfrm>
+          <a:prstGeom prst="rect">
+            <a:avLst>
+              <a:gd name="adj" fmla="val 8333"/>
+            </a:avLst>
+          </a:prstGeom>
+          <a:solidFill>
+            <a:srgbClr val="F8FAFC"/>
+          </a:solidFill>
+          <a:ln w="12700">
+            <a:solidFill>
+              <a:srgbClr val="E2E8F0"/>
+            </a:solidFill>
+            <a:prstDash val="dash"/>
+          </a:ln>
+        </p:spPr>
       </p:sp>
       <p:sp>
         <p:nvSpPr>
@@ -28563,120 +28436,74 @@
         </p:nvSpPr>
         <p:spPr>
           <a:xfrm>
-            <a:off x="5329123" y="2569464"/>
-            <a:ext cx="1581912" cy="201168"/>
-          </a:xfrm>
-          <a:prstGeom prst="rect">
-            <a:avLst/>
-          </a:prstGeom>
-          <a:noFill/>
-          <a:ln/>
-        </p:spPr>
-        <p:txBody>
-          <a:bodyPr wrap="square" lIns="0" tIns="0" rIns="0" bIns="0" rtlCol="0" anchor="t"/>
-          <a:lstStyle/>
-          <a:p>
-            <a:pPr algn="ctr" indent="0" marL="0">
-              <a:buNone/>
-            </a:pPr>
-            <a:r>
-              <a:rPr lang="en-US" sz="850" dirty="0">
-                <a:solidFill>
-                  <a:srgbClr val="475569"/>
+            <a:off x="1874520" y="3273552"/>
+            <a:ext cx="6903720" cy="658368"/>
+          </a:xfrm>
+          <a:prstGeom prst="rect">
+            <a:avLst/>
+          </a:prstGeom>
+          <a:noFill/>
+          <a:ln/>
+        </p:spPr>
+        <p:txBody>
+          <a:bodyPr wrap="square" rtlCol="0" anchor="ctr"/>
+          <a:lstStyle/>
+          <a:p>
+            <a:pPr algn="ctr" indent="0" marL="0">
+              <a:buNone/>
+            </a:pPr>
+            <a:r>
+              <a:rPr lang="en-US" sz="1100" i="1" dirty="0">
+                <a:solidFill>
+                  <a:srgbClr val="CBD5E1"/>
                 </a:solidFill>
                 <a:latin typeface="Calibri" pitchFamily="34" charset="0"/>
                 <a:ea typeface="Calibri" pitchFamily="34" charset="-122"/>
                 <a:cs typeface="Calibri" pitchFamily="34" charset="-120"/>
               </a:rPr>
-              <a:t>doubled consonant before suffix</a:t>
-            </a:r>
-            <a:endParaRPr lang="en-US" sz="850" dirty="0"/>
-          </a:p>
-        </p:txBody>
-      </p:sp>
-      <p:sp>
-        <p:nvSpPr>
-          <p:cNvPr id="26" name="Text 24"/>
-          <p:cNvSpPr/>
-          <p:nvPr/>
-        </p:nvSpPr>
-        <p:spPr>
-          <a:xfrm>
-            <a:off x="5329123" y="2752344"/>
-            <a:ext cx="1581912" cy="182880"/>
-          </a:xfrm>
-          <a:prstGeom prst="rect">
-            <a:avLst/>
-          </a:prstGeom>
-          <a:noFill/>
-          <a:ln/>
-        </p:spPr>
-        <p:txBody>
-          <a:bodyPr wrap="square" lIns="0" tIns="0" rIns="0" bIns="0" rtlCol="0" anchor="t"/>
-          <a:lstStyle/>
-          <a:p>
-            <a:pPr algn="ctr" indent="0" marL="0">
-              <a:buNone/>
-            </a:pPr>
-            <a:r>
-              <a:rPr lang="en-US" sz="700" i="1" dirty="0">
-                <a:solidFill>
-                  <a:srgbClr val="94A3B8"/>
-                </a:solidFill>
-                <a:latin typeface="Calibri" pitchFamily="34" charset="0"/>
-                <a:ea typeface="Calibri" pitchFamily="34" charset="-122"/>
-                <a:cs typeface="Calibri" pitchFamily="34" charset="-120"/>
-              </a:rPr>
-              <a:t>final 't' doubled before vowel suffix</a:t>
-            </a:r>
-            <a:endParaRPr lang="en-US" sz="700" dirty="0"/>
-          </a:p>
-        </p:txBody>
-      </p:sp>
-      <p:sp>
-        <p:nvSpPr>
-          <p:cNvPr id="27" name="Shape 25"/>
-          <p:cNvSpPr/>
-          <p:nvPr/>
-        </p:nvSpPr>
-        <p:spPr>
-          <a:xfrm>
-            <a:off x="6998818" y="2258568"/>
-            <a:ext cx="1581912" cy="292608"/>
+              <a:t>Write here...</a:t>
+            </a:r>
+            <a:endParaRPr lang="en-US" sz="1100" dirty="0"/>
+          </a:p>
+        </p:txBody>
+      </p:sp>
+      <p:sp>
+        <p:nvSpPr>
+          <p:cNvPr id="26" name="Shape 24"/>
+          <p:cNvSpPr/>
+          <p:nvPr/>
+        </p:nvSpPr>
+        <p:spPr>
+          <a:xfrm>
+            <a:off x="365760" y="4096512"/>
+            <a:ext cx="1371600" cy="804672"/>
           </a:xfrm>
           <a:prstGeom prst="rect">
             <a:avLst>
-              <a:gd name="adj" fmla="val 25000"/>
+              <a:gd name="adj" fmla="val 6818"/>
             </a:avLst>
           </a:prstGeom>
           <a:solidFill>
-            <a:srgbClr val="FCE7F3"/>
-          </a:solidFill>
-          <a:ln w="19050">
-            <a:solidFill>
-              <a:srgbClr val="DB2777"/>
-            </a:solidFill>
-            <a:prstDash val="solid"/>
-          </a:ln>
-          <a:effectLst>
-            <a:outerShdw sx="100000" sy="100000" kx="0" ky="0" algn="bl" rotWithShape="0" blurRad="101600" dist="38100" dir="8100000">
-              <a:srgbClr val="000000">
-                <a:alpha val="12000"/>
-              </a:srgbClr>
-            </a:outerShdw>
-          </a:effectLst>
-        </p:spPr>
-      </p:sp>
-      <p:sp>
-        <p:nvSpPr>
-          <p:cNvPr id="28" name="Text 26"/>
-          <p:cNvSpPr/>
-          <p:nvPr/>
-        </p:nvSpPr>
-        <p:spPr>
-          <a:xfrm>
-            <a:off x="6998818" y="2258568"/>
-            <a:ext cx="1581912" cy="292608"/>
+            <a:srgbClr val="E2E8F0"/>
+          </a:solidFill>
+          <a:ln w="12700">
+            <a:solidFill>
+              <a:srgbClr val="E2E8F0"/>
+            </a:solidFill>
+            <a:prstDash val="solid"/>
+          </a:ln>
+        </p:spPr>
+      </p:sp>
+      <p:sp>
+        <p:nvSpPr>
+          <p:cNvPr id="27" name="Text 25"/>
+          <p:cNvSpPr/>
+          <p:nvPr/>
+        </p:nvSpPr>
+        <p:spPr>
+          <a:xfrm>
+            <a:off x="365760" y="4096512"/>
+            <a:ext cx="1371600" cy="804672"/>
           </a:xfrm>
           <a:prstGeom prst="rect">
             <a:avLst/>
@@ -28692,120 +28519,15 @@
               <a:buNone/>
             </a:pPr>
             <a:r>
-              <a:rPr lang="en-US" sz="1300" b="1" dirty="0">
-                <a:solidFill>
-                  <a:srgbClr val="9D174D"/>
+              <a:rPr lang="en-US" sz="1100" b="1" dirty="0">
+                <a:solidFill>
+                  <a:srgbClr val="475569"/>
                 </a:solidFill>
                 <a:latin typeface="Trebuchet MS" pitchFamily="34" charset="0"/>
                 <a:ea typeface="Trebuchet MS" pitchFamily="34" charset="-122"/>
                 <a:cs typeface="Trebuchet MS" pitchFamily="34" charset="-120"/>
               </a:rPr>
-              <a:t>ed</a:t>
-            </a:r>
-            <a:endParaRPr lang="en-US" sz="1300" dirty="0"/>
-          </a:p>
-        </p:txBody>
-      </p:sp>
-      <p:sp>
-        <p:nvSpPr>
-          <p:cNvPr id="29" name="Text 27"/>
-          <p:cNvSpPr/>
-          <p:nvPr/>
-        </p:nvSpPr>
-        <p:spPr>
-          <a:xfrm>
-            <a:off x="6998818" y="2569464"/>
-            <a:ext cx="1581912" cy="201168"/>
-          </a:xfrm>
-          <a:prstGeom prst="rect">
-            <a:avLst/>
-          </a:prstGeom>
-          <a:noFill/>
-          <a:ln/>
-        </p:spPr>
-        <p:txBody>
-          <a:bodyPr wrap="square" lIns="0" tIns="0" rIns="0" bIns="0" rtlCol="0" anchor="t"/>
-          <a:lstStyle/>
-          <a:p>
-            <a:pPr algn="ctr" indent="0" marL="0">
-              <a:buNone/>
-            </a:pPr>
-            <a:r>
-              <a:rPr lang="en-US" sz="850" dirty="0">
-                <a:solidFill>
-                  <a:srgbClr val="475569"/>
-                </a:solidFill>
-                <a:latin typeface="Calibri" pitchFamily="34" charset="0"/>
-                <a:ea typeface="Calibri" pitchFamily="34" charset="-122"/>
-                <a:cs typeface="Calibri" pitchFamily="34" charset="-120"/>
-              </a:rPr>
-              <a:t>past tense</a:t>
-            </a:r>
-            <a:endParaRPr lang="en-US" sz="850" dirty="0"/>
-          </a:p>
-        </p:txBody>
-      </p:sp>
-      <p:sp>
-        <p:nvSpPr>
-          <p:cNvPr id="30" name="Shape 28"/>
-          <p:cNvSpPr/>
-          <p:nvPr/>
-        </p:nvSpPr>
-        <p:spPr>
-          <a:xfrm>
-            <a:off x="365760" y="3273552"/>
-            <a:ext cx="1371600" cy="658368"/>
-          </a:xfrm>
-          <a:prstGeom prst="rect">
-            <a:avLst>
-              <a:gd name="adj" fmla="val 8333"/>
-            </a:avLst>
-          </a:prstGeom>
-          <a:solidFill>
-            <a:srgbClr val="E2E8F0"/>
-          </a:solidFill>
-          <a:ln w="12700">
-            <a:solidFill>
-              <a:srgbClr val="E2E8F0"/>
-            </a:solidFill>
-            <a:prstDash val="solid"/>
-          </a:ln>
-        </p:spPr>
-      </p:sp>
-      <p:sp>
-        <p:nvSpPr>
-          <p:cNvPr id="31" name="Text 29"/>
-          <p:cNvSpPr/>
-          <p:nvPr/>
-        </p:nvSpPr>
-        <p:spPr>
-          <a:xfrm>
-            <a:off x="365760" y="3273552"/>
-            <a:ext cx="1371600" cy="658368"/>
-          </a:xfrm>
-          <a:prstGeom prst="rect">
-            <a:avLst/>
-          </a:prstGeom>
-          <a:noFill/>
-          <a:ln/>
-        </p:spPr>
-        <p:txBody>
-          <a:bodyPr wrap="square" lIns="0" tIns="0" rIns="0" bIns="0" rtlCol="0" anchor="ctr"/>
-          <a:lstStyle/>
-          <a:p>
-            <a:pPr algn="ctr" indent="0" marL="0">
-              <a:buNone/>
-            </a:pPr>
-            <a:r>
-              <a:rPr lang="en-US" sz="1100" b="1" dirty="0">
-                <a:solidFill>
-                  <a:srgbClr val="475569"/>
-                </a:solidFill>
-                <a:latin typeface="Trebuchet MS" pitchFamily="34" charset="0"/>
-                <a:ea typeface="Trebuchet MS" pitchFamily="34" charset="-122"/>
-                <a:cs typeface="Trebuchet MS" pitchFamily="34" charset="-120"/>
-              </a:rPr>
-              <a:t>Syllables</a:t>
+              <a:t>Phonemes</a:t>
             </a:r>
             <a:endParaRPr lang="en-US" sz="1100" dirty="0"/>
           </a:p>
@@ -28813,80 +28535,14 @@
       </p:sp>
       <p:sp>
         <p:nvSpPr>
-          <p:cNvPr id="32" name="Shape 30"/>
-          <p:cNvSpPr/>
-          <p:nvPr/>
-        </p:nvSpPr>
-        <p:spPr>
-          <a:xfrm>
-            <a:off x="1874520" y="3273552"/>
-            <a:ext cx="6903720" cy="658368"/>
-          </a:xfrm>
-          <a:prstGeom prst="rect">
-            <a:avLst>
-              <a:gd name="adj" fmla="val 8333"/>
-            </a:avLst>
-          </a:prstGeom>
-          <a:solidFill>
-            <a:srgbClr val="F8FAFC"/>
-          </a:solidFill>
-          <a:ln w="12700">
-            <a:solidFill>
-              <a:srgbClr val="E2E8F0"/>
-            </a:solidFill>
-            <a:prstDash val="dash"/>
-          </a:ln>
-        </p:spPr>
-      </p:sp>
-      <p:sp>
-        <p:nvSpPr>
-          <p:cNvPr id="33" name="Text 31"/>
-          <p:cNvSpPr/>
-          <p:nvPr/>
-        </p:nvSpPr>
-        <p:spPr>
-          <a:xfrm>
-            <a:off x="1874520" y="3273552"/>
-            <a:ext cx="6903720" cy="658368"/>
-          </a:xfrm>
-          <a:prstGeom prst="rect">
-            <a:avLst/>
-          </a:prstGeom>
-          <a:noFill/>
-          <a:ln/>
-        </p:spPr>
-        <p:txBody>
-          <a:bodyPr wrap="square" rtlCol="0" anchor="ctr"/>
-          <a:lstStyle/>
-          <a:p>
-            <a:pPr algn="ctr" indent="0" marL="0">
-              <a:buNone/>
-            </a:pPr>
-            <a:r>
-              <a:rPr lang="en-US" sz="1100" i="1" dirty="0">
-                <a:solidFill>
-                  <a:srgbClr val="CBD5E1"/>
-                </a:solidFill>
-                <a:latin typeface="Calibri" pitchFamily="34" charset="0"/>
-                <a:ea typeface="Calibri" pitchFamily="34" charset="-122"/>
-                <a:cs typeface="Calibri" pitchFamily="34" charset="-120"/>
-              </a:rPr>
-              <a:t>Write here...</a:t>
-            </a:r>
-            <a:endParaRPr lang="en-US" sz="1100" dirty="0"/>
-          </a:p>
-        </p:txBody>
-      </p:sp>
-      <p:sp>
-        <p:nvSpPr>
-          <p:cNvPr id="34" name="Shape 32"/>
-          <p:cNvSpPr/>
-          <p:nvPr/>
-        </p:nvSpPr>
-        <p:spPr>
-          <a:xfrm>
-            <a:off x="365760" y="4096512"/>
-            <a:ext cx="1371600" cy="804672"/>
+          <p:cNvPr id="28" name="Shape 26"/>
+          <p:cNvSpPr/>
+          <p:nvPr/>
+        </p:nvSpPr>
+        <p:spPr>
+          <a:xfrm>
+            <a:off x="1874520" y="4096512"/>
+            <a:ext cx="6903720" cy="804672"/>
           </a:xfrm>
           <a:prstGeom prst="rect">
             <a:avLst>
@@ -28894,85 +28550,19 @@
             </a:avLst>
           </a:prstGeom>
           <a:solidFill>
-            <a:srgbClr val="E2E8F0"/>
+            <a:srgbClr val="F8FAFC"/>
           </a:solidFill>
           <a:ln w="12700">
             <a:solidFill>
               <a:srgbClr val="E2E8F0"/>
             </a:solidFill>
-            <a:prstDash val="solid"/>
-          </a:ln>
-        </p:spPr>
-      </p:sp>
-      <p:sp>
-        <p:nvSpPr>
-          <p:cNvPr id="35" name="Text 33"/>
-          <p:cNvSpPr/>
-          <p:nvPr/>
-        </p:nvSpPr>
-        <p:spPr>
-          <a:xfrm>
-            <a:off x="365760" y="4096512"/>
-            <a:ext cx="1371600" cy="804672"/>
-          </a:xfrm>
-          <a:prstGeom prst="rect">
-            <a:avLst/>
-          </a:prstGeom>
-          <a:noFill/>
-          <a:ln/>
-        </p:spPr>
-        <p:txBody>
-          <a:bodyPr wrap="square" lIns="0" tIns="0" rIns="0" bIns="0" rtlCol="0" anchor="ctr"/>
-          <a:lstStyle/>
-          <a:p>
-            <a:pPr algn="ctr" indent="0" marL="0">
-              <a:buNone/>
-            </a:pPr>
-            <a:r>
-              <a:rPr lang="en-US" sz="1100" b="1" dirty="0">
-                <a:solidFill>
-                  <a:srgbClr val="475569"/>
-                </a:solidFill>
-                <a:latin typeface="Trebuchet MS" pitchFamily="34" charset="0"/>
-                <a:ea typeface="Trebuchet MS" pitchFamily="34" charset="-122"/>
-                <a:cs typeface="Trebuchet MS" pitchFamily="34" charset="-120"/>
-              </a:rPr>
-              <a:t>Phonemes</a:t>
-            </a:r>
-            <a:endParaRPr lang="en-US" sz="1100" dirty="0"/>
-          </a:p>
-        </p:txBody>
-      </p:sp>
-      <p:sp>
-        <p:nvSpPr>
-          <p:cNvPr id="36" name="Shape 34"/>
-          <p:cNvSpPr/>
-          <p:nvPr/>
-        </p:nvSpPr>
-        <p:spPr>
-          <a:xfrm>
-            <a:off x="1874520" y="4096512"/>
-            <a:ext cx="6903720" cy="804672"/>
-          </a:xfrm>
-          <a:prstGeom prst="rect">
-            <a:avLst>
-              <a:gd name="adj" fmla="val 6818"/>
-            </a:avLst>
-          </a:prstGeom>
-          <a:solidFill>
-            <a:srgbClr val="F8FAFC"/>
-          </a:solidFill>
-          <a:ln w="12700">
-            <a:solidFill>
-              <a:srgbClr val="E2E8F0"/>
-            </a:solidFill>
             <a:prstDash val="dash"/>
           </a:ln>
         </p:spPr>
       </p:sp>
       <p:sp>
         <p:nvSpPr>
-          <p:cNvPr id="37" name="Text 35"/>
+          <p:cNvPr id="29" name="Text 27"/>
           <p:cNvSpPr/>
           <p:nvPr/>
         </p:nvSpPr>
@@ -29434,7 +29024,7 @@
                 <a:ea typeface="Trebuchet MS" pitchFamily="34" charset="-122"/>
                 <a:cs typeface="Trebuchet MS" pitchFamily="34" charset="-120"/>
               </a:rPr>
-              <a:t>committed</a:t>
+              <a:t>permit</a:t>
             </a:r>
             <a:endParaRPr lang="en-US" sz="2800" dirty="0"/>
           </a:p>
@@ -29514,8 +29104,8 @@
         </p:nvSpPr>
         <p:spPr>
           <a:xfrm>
-            <a:off x="1989734" y="2258568"/>
-            <a:ext cx="1581912" cy="292608"/>
+            <a:off x="2938272" y="2258568"/>
+            <a:ext cx="1828800" cy="292608"/>
           </a:xfrm>
           <a:prstGeom prst="rect">
             <a:avLst>
@@ -29548,8 +29138,8 @@
         </p:nvSpPr>
         <p:spPr>
           <a:xfrm>
-            <a:off x="1989734" y="2258568"/>
-            <a:ext cx="1581912" cy="292608"/>
+            <a:off x="2938272" y="2258568"/>
+            <a:ext cx="1828800" cy="292608"/>
           </a:xfrm>
           <a:prstGeom prst="rect">
             <a:avLst/>
@@ -29573,7 +29163,7 @@
                 <a:ea typeface="Trebuchet MS" pitchFamily="34" charset="-122"/>
                 <a:cs typeface="Trebuchet MS" pitchFamily="34" charset="-120"/>
               </a:rPr>
-              <a:t>com</a:t>
+              <a:t>per</a:t>
             </a:r>
             <a:endParaRPr lang="en-US" sz="1300" dirty="0"/>
           </a:p>
@@ -29587,8 +29177,8 @@
         </p:nvSpPr>
         <p:spPr>
           <a:xfrm>
-            <a:off x="1989734" y="2569464"/>
-            <a:ext cx="1581912" cy="201168"/>
+            <a:off x="2938272" y="2569464"/>
+            <a:ext cx="1828800" cy="201168"/>
           </a:xfrm>
           <a:prstGeom prst="rect">
             <a:avLst/>
@@ -29612,7 +29202,7 @@
                 <a:ea typeface="Calibri" pitchFamily="34" charset="-122"/>
                 <a:cs typeface="Calibri" pitchFamily="34" charset="-120"/>
               </a:rPr>
-              <a:t>together, with</a:t>
+              <a:t>through, thoroughly</a:t>
             </a:r>
             <a:endParaRPr lang="en-US" sz="850" dirty="0"/>
           </a:p>
@@ -29620,53 +29210,14 @@
       </p:sp>
       <p:sp>
         <p:nvSpPr>
-          <p:cNvPr id="19" name="Text 17"/>
-          <p:cNvSpPr/>
-          <p:nvPr/>
-        </p:nvSpPr>
-        <p:spPr>
-          <a:xfrm>
-            <a:off x="1989734" y="2752344"/>
-            <a:ext cx="1581912" cy="182880"/>
-          </a:xfrm>
-          <a:prstGeom prst="rect">
-            <a:avLst/>
-          </a:prstGeom>
-          <a:noFill/>
-          <a:ln/>
-        </p:spPr>
-        <p:txBody>
-          <a:bodyPr wrap="square" lIns="0" tIns="0" rIns="0" bIns="0" rtlCol="0" anchor="t"/>
-          <a:lstStyle/>
-          <a:p>
-            <a:pPr algn="ctr" indent="0" marL="0">
-              <a:buNone/>
-            </a:pPr>
-            <a:r>
-              <a:rPr lang="en-US" sz="700" i="1" dirty="0">
-                <a:solidFill>
-                  <a:srgbClr val="94A3B8"/>
-                </a:solidFill>
-                <a:latin typeface="Calibri" pitchFamily="34" charset="0"/>
-                <a:ea typeface="Calibri" pitchFamily="34" charset="-122"/>
-                <a:cs typeface="Calibri" pitchFamily="34" charset="-120"/>
-              </a:rPr>
-              <a:t>con → com before 'm'</a:t>
-            </a:r>
-            <a:endParaRPr lang="en-US" sz="700" dirty="0"/>
-          </a:p>
-        </p:txBody>
-      </p:sp>
-      <p:sp>
-        <p:nvSpPr>
-          <p:cNvPr id="20" name="Shape 18"/>
-          <p:cNvSpPr/>
-          <p:nvPr/>
-        </p:nvSpPr>
-        <p:spPr>
-          <a:xfrm>
-            <a:off x="3659429" y="2258568"/>
-            <a:ext cx="1581912" cy="292608"/>
+          <p:cNvPr id="19" name="Shape 17"/>
+          <p:cNvSpPr/>
+          <p:nvPr/>
+        </p:nvSpPr>
+        <p:spPr>
+          <a:xfrm>
+            <a:off x="5803392" y="2258568"/>
+            <a:ext cx="1828800" cy="292608"/>
           </a:xfrm>
           <a:prstGeom prst="rect">
             <a:avLst>
@@ -29693,14 +29244,14 @@
       </p:sp>
       <p:sp>
         <p:nvSpPr>
-          <p:cNvPr id="21" name="Text 19"/>
-          <p:cNvSpPr/>
-          <p:nvPr/>
-        </p:nvSpPr>
-        <p:spPr>
-          <a:xfrm>
-            <a:off x="3659429" y="2258568"/>
-            <a:ext cx="1581912" cy="292608"/>
+          <p:cNvPr id="20" name="Text 18"/>
+          <p:cNvSpPr/>
+          <p:nvPr/>
+        </p:nvSpPr>
+        <p:spPr>
+          <a:xfrm>
+            <a:off x="5803392" y="2258568"/>
+            <a:ext cx="1828800" cy="292608"/>
           </a:xfrm>
           <a:prstGeom prst="rect">
             <a:avLst/>
@@ -29732,14 +29283,14 @@
       </p:sp>
       <p:sp>
         <p:nvSpPr>
-          <p:cNvPr id="22" name="Text 20"/>
-          <p:cNvSpPr/>
-          <p:nvPr/>
-        </p:nvSpPr>
-        <p:spPr>
-          <a:xfrm>
-            <a:off x="3659429" y="2569464"/>
-            <a:ext cx="1581912" cy="201168"/>
+          <p:cNvPr id="21" name="Text 19"/>
+          <p:cNvSpPr/>
+          <p:nvPr/>
+        </p:nvSpPr>
+        <p:spPr>
+          <a:xfrm>
+            <a:off x="5803392" y="2569464"/>
+            <a:ext cx="1828800" cy="201168"/>
           </a:xfrm>
           <a:prstGeom prst="rect">
             <a:avLst/>
@@ -29763,7 +29314,7 @@
                 <a:ea typeface="Calibri" pitchFamily="34" charset="-122"/>
                 <a:cs typeface="Calibri" pitchFamily="34" charset="-120"/>
               </a:rPr>
-              <a:t>send, let go</a:t>
+              <a:t>send</a:t>
             </a:r>
             <a:endParaRPr lang="en-US" sz="850" dirty="0"/>
           </a:p>
@@ -29771,48 +29322,41 @@
       </p:sp>
       <p:sp>
         <p:nvSpPr>
-          <p:cNvPr id="23" name="Shape 21"/>
-          <p:cNvSpPr/>
-          <p:nvPr/>
-        </p:nvSpPr>
-        <p:spPr>
-          <a:xfrm>
-            <a:off x="5329123" y="2258568"/>
-            <a:ext cx="1581912" cy="292608"/>
+          <p:cNvPr id="22" name="Shape 20"/>
+          <p:cNvSpPr/>
+          <p:nvPr/>
+        </p:nvSpPr>
+        <p:spPr>
+          <a:xfrm>
+            <a:off x="365760" y="3273552"/>
+            <a:ext cx="1371600" cy="658368"/>
           </a:xfrm>
           <a:prstGeom prst="rect">
             <a:avLst>
-              <a:gd name="adj" fmla="val 25000"/>
+              <a:gd name="adj" fmla="val 8333"/>
             </a:avLst>
           </a:prstGeom>
           <a:solidFill>
-            <a:srgbClr val="FCE7F3"/>
-          </a:solidFill>
-          <a:ln w="19050">
-            <a:solidFill>
-              <a:srgbClr val="DB2777"/>
-            </a:solidFill>
-            <a:prstDash val="solid"/>
-          </a:ln>
-          <a:effectLst>
-            <a:outerShdw sx="100000" sy="100000" kx="0" ky="0" algn="bl" rotWithShape="0" blurRad="101600" dist="38100" dir="8100000">
-              <a:srgbClr val="000000">
-                <a:alpha val="12000"/>
-              </a:srgbClr>
-            </a:outerShdw>
-          </a:effectLst>
-        </p:spPr>
-      </p:sp>
-      <p:sp>
-        <p:nvSpPr>
-          <p:cNvPr id="24" name="Text 22"/>
-          <p:cNvSpPr/>
-          <p:nvPr/>
-        </p:nvSpPr>
-        <p:spPr>
-          <a:xfrm>
-            <a:off x="5329123" y="2258568"/>
-            <a:ext cx="1581912" cy="292608"/>
+            <a:srgbClr val="E2E8F0"/>
+          </a:solidFill>
+          <a:ln w="12700">
+            <a:solidFill>
+              <a:srgbClr val="E2E8F0"/>
+            </a:solidFill>
+            <a:prstDash val="solid"/>
+          </a:ln>
+        </p:spPr>
+      </p:sp>
+      <p:sp>
+        <p:nvSpPr>
+          <p:cNvPr id="23" name="Text 21"/>
+          <p:cNvSpPr/>
+          <p:nvPr/>
+        </p:nvSpPr>
+        <p:spPr>
+          <a:xfrm>
+            <a:off x="365760" y="3273552"/>
+            <a:ext cx="1371600" cy="658368"/>
           </a:xfrm>
           <a:prstGeom prst="rect">
             <a:avLst/>
@@ -29828,58 +29372,73 @@
               <a:buNone/>
             </a:pPr>
             <a:r>
-              <a:rPr lang="en-US" sz="1300" b="1" dirty="0">
-                <a:solidFill>
-                  <a:srgbClr val="9D174D"/>
+              <a:rPr lang="en-US" sz="1100" b="1" dirty="0">
+                <a:solidFill>
+                  <a:srgbClr val="475569"/>
                 </a:solidFill>
                 <a:latin typeface="Trebuchet MS" pitchFamily="34" charset="0"/>
                 <a:ea typeface="Trebuchet MS" pitchFamily="34" charset="-122"/>
                 <a:cs typeface="Trebuchet MS" pitchFamily="34" charset="-120"/>
               </a:rPr>
-              <a:t>t</a:t>
-            </a:r>
-            <a:endParaRPr lang="en-US" sz="1300" dirty="0"/>
-          </a:p>
-        </p:txBody>
-      </p:sp>
-      <p:sp>
-        <p:nvSpPr>
-          <p:cNvPr id="25" name="Text 23"/>
-          <p:cNvSpPr/>
-          <p:nvPr/>
-        </p:nvSpPr>
-        <p:spPr>
-          <a:xfrm>
-            <a:off x="5329123" y="2569464"/>
-            <a:ext cx="1581912" cy="201168"/>
-          </a:xfrm>
-          <a:prstGeom prst="rect">
-            <a:avLst/>
-          </a:prstGeom>
-          <a:noFill/>
-          <a:ln/>
-        </p:spPr>
-        <p:txBody>
-          <a:bodyPr wrap="square" lIns="0" tIns="0" rIns="0" bIns="0" rtlCol="0" anchor="t"/>
-          <a:lstStyle/>
-          <a:p>
-            <a:pPr algn="ctr" indent="0" marL="0">
-              <a:buNone/>
-            </a:pPr>
-            <a:r>
-              <a:rPr lang="en-US" sz="850" dirty="0">
-                <a:solidFill>
-                  <a:srgbClr val="475569"/>
-                </a:solidFill>
-                <a:latin typeface="Calibri" pitchFamily="34" charset="0"/>
-                <a:ea typeface="Calibri" pitchFamily="34" charset="-122"/>
-                <a:cs typeface="Calibri" pitchFamily="34" charset="-120"/>
-              </a:rPr>
-              <a:t>doubled consonant before suffix</a:t>
-            </a:r>
-            <a:endParaRPr lang="en-US" sz="850" dirty="0"/>
-          </a:p>
-        </p:txBody>
+              <a:t>Syllables</a:t>
+            </a:r>
+            <a:endParaRPr lang="en-US" sz="1100" dirty="0"/>
+          </a:p>
+        </p:txBody>
+      </p:sp>
+      <p:sp>
+        <p:nvSpPr>
+          <p:cNvPr id="24" name="Shape 22"/>
+          <p:cNvSpPr/>
+          <p:nvPr/>
+        </p:nvSpPr>
+        <p:spPr>
+          <a:xfrm>
+            <a:off x="1874520" y="3273552"/>
+            <a:ext cx="6903720" cy="658368"/>
+          </a:xfrm>
+          <a:prstGeom prst="rect">
+            <a:avLst>
+              <a:gd name="adj" fmla="val 8333"/>
+            </a:avLst>
+          </a:prstGeom>
+          <a:solidFill>
+            <a:srgbClr val="CCFBF1"/>
+          </a:solidFill>
+          <a:ln w="12700">
+            <a:solidFill>
+              <a:srgbClr val="0D9488"/>
+            </a:solidFill>
+            <a:prstDash val="solid"/>
+          </a:ln>
+        </p:spPr>
+      </p:sp>
+      <p:sp>
+        <p:nvSpPr>
+          <p:cNvPr id="25" name="Shape 23"/>
+          <p:cNvSpPr/>
+          <p:nvPr/>
+        </p:nvSpPr>
+        <p:spPr>
+          <a:xfrm>
+            <a:off x="2999232" y="3364992"/>
+            <a:ext cx="1645920" cy="475488"/>
+          </a:xfrm>
+          <a:prstGeom prst="rect">
+            <a:avLst>
+              <a:gd name="adj" fmla="val 9615"/>
+            </a:avLst>
+          </a:prstGeom>
+          <a:solidFill>
+            <a:srgbClr val="FFFFFF"/>
+          </a:solidFill>
+          <a:ln w="12700">
+            <a:solidFill>
+              <a:srgbClr val="0D9488"/>
+            </a:solidFill>
+            <a:prstDash val="solid"/>
+          </a:ln>
+        </p:spPr>
       </p:sp>
       <p:sp>
         <p:nvSpPr>
@@ -29889,81 +29448,8 @@
         </p:nvSpPr>
         <p:spPr>
           <a:xfrm>
-            <a:off x="5329123" y="2752344"/>
-            <a:ext cx="1581912" cy="182880"/>
-          </a:xfrm>
-          <a:prstGeom prst="rect">
-            <a:avLst/>
-          </a:prstGeom>
-          <a:noFill/>
-          <a:ln/>
-        </p:spPr>
-        <p:txBody>
-          <a:bodyPr wrap="square" lIns="0" tIns="0" rIns="0" bIns="0" rtlCol="0" anchor="t"/>
-          <a:lstStyle/>
-          <a:p>
-            <a:pPr algn="ctr" indent="0" marL="0">
-              <a:buNone/>
-            </a:pPr>
-            <a:r>
-              <a:rPr lang="en-US" sz="700" i="1" dirty="0">
-                <a:solidFill>
-                  <a:srgbClr val="94A3B8"/>
-                </a:solidFill>
-                <a:latin typeface="Calibri" pitchFamily="34" charset="0"/>
-                <a:ea typeface="Calibri" pitchFamily="34" charset="-122"/>
-                <a:cs typeface="Calibri" pitchFamily="34" charset="-120"/>
-              </a:rPr>
-              <a:t>final 't' doubled before vowel suffix</a:t>
-            </a:r>
-            <a:endParaRPr lang="en-US" sz="700" dirty="0"/>
-          </a:p>
-        </p:txBody>
-      </p:sp>
-      <p:sp>
-        <p:nvSpPr>
-          <p:cNvPr id="27" name="Shape 25"/>
-          <p:cNvSpPr/>
-          <p:nvPr/>
-        </p:nvSpPr>
-        <p:spPr>
-          <a:xfrm>
-            <a:off x="6998818" y="2258568"/>
-            <a:ext cx="1581912" cy="292608"/>
-          </a:xfrm>
-          <a:prstGeom prst="rect">
-            <a:avLst>
-              <a:gd name="adj" fmla="val 25000"/>
-            </a:avLst>
-          </a:prstGeom>
-          <a:solidFill>
-            <a:srgbClr val="FCE7F3"/>
-          </a:solidFill>
-          <a:ln w="19050">
-            <a:solidFill>
-              <a:srgbClr val="DB2777"/>
-            </a:solidFill>
-            <a:prstDash val="solid"/>
-          </a:ln>
-          <a:effectLst>
-            <a:outerShdw sx="100000" sy="100000" kx="0" ky="0" algn="bl" rotWithShape="0" blurRad="101600" dist="38100" dir="8100000">
-              <a:srgbClr val="000000">
-                <a:alpha val="12000"/>
-              </a:srgbClr>
-            </a:outerShdw>
-          </a:effectLst>
-        </p:spPr>
-      </p:sp>
-      <p:sp>
-        <p:nvSpPr>
-          <p:cNvPr id="28" name="Text 26"/>
-          <p:cNvSpPr/>
-          <p:nvPr/>
-        </p:nvSpPr>
-        <p:spPr>
-          <a:xfrm>
-            <a:off x="6998818" y="2258568"/>
-            <a:ext cx="1581912" cy="292608"/>
+            <a:off x="2999232" y="3364992"/>
+            <a:ext cx="1645920" cy="475488"/>
           </a:xfrm>
           <a:prstGeom prst="rect">
             <a:avLst/>
@@ -29979,96 +29465,30 @@
               <a:buNone/>
             </a:pPr>
             <a:r>
-              <a:rPr lang="en-US" sz="1300" b="1" dirty="0">
-                <a:solidFill>
-                  <a:srgbClr val="9D174D"/>
+              <a:rPr lang="en-US" sz="1400" b="1" dirty="0">
+                <a:solidFill>
+                  <a:srgbClr val="0D9488"/>
                 </a:solidFill>
                 <a:latin typeface="Trebuchet MS" pitchFamily="34" charset="0"/>
                 <a:ea typeface="Trebuchet MS" pitchFamily="34" charset="-122"/>
                 <a:cs typeface="Trebuchet MS" pitchFamily="34" charset="-120"/>
               </a:rPr>
-              <a:t>ed</a:t>
-            </a:r>
-            <a:endParaRPr lang="en-US" sz="1300" dirty="0"/>
-          </a:p>
-        </p:txBody>
-      </p:sp>
-      <p:sp>
-        <p:nvSpPr>
-          <p:cNvPr id="29" name="Text 27"/>
-          <p:cNvSpPr/>
-          <p:nvPr/>
-        </p:nvSpPr>
-        <p:spPr>
-          <a:xfrm>
-            <a:off x="6998818" y="2569464"/>
-            <a:ext cx="1581912" cy="201168"/>
-          </a:xfrm>
-          <a:prstGeom prst="rect">
-            <a:avLst/>
-          </a:prstGeom>
-          <a:noFill/>
-          <a:ln/>
-        </p:spPr>
-        <p:txBody>
-          <a:bodyPr wrap="square" lIns="0" tIns="0" rIns="0" bIns="0" rtlCol="0" anchor="t"/>
-          <a:lstStyle/>
-          <a:p>
-            <a:pPr algn="ctr" indent="0" marL="0">
-              <a:buNone/>
-            </a:pPr>
-            <a:r>
-              <a:rPr lang="en-US" sz="850" dirty="0">
-                <a:solidFill>
-                  <a:srgbClr val="475569"/>
-                </a:solidFill>
-                <a:latin typeface="Calibri" pitchFamily="34" charset="0"/>
-                <a:ea typeface="Calibri" pitchFamily="34" charset="-122"/>
-                <a:cs typeface="Calibri" pitchFamily="34" charset="-120"/>
-              </a:rPr>
-              <a:t>past tense</a:t>
-            </a:r>
-            <a:endParaRPr lang="en-US" sz="850" dirty="0"/>
-          </a:p>
-        </p:txBody>
-      </p:sp>
-      <p:sp>
-        <p:nvSpPr>
-          <p:cNvPr id="30" name="Shape 28"/>
-          <p:cNvSpPr/>
-          <p:nvPr/>
-        </p:nvSpPr>
-        <p:spPr>
-          <a:xfrm>
-            <a:off x="365760" y="3273552"/>
-            <a:ext cx="1371600" cy="658368"/>
-          </a:xfrm>
-          <a:prstGeom prst="rect">
-            <a:avLst>
-              <a:gd name="adj" fmla="val 8333"/>
-            </a:avLst>
-          </a:prstGeom>
-          <a:solidFill>
-            <a:srgbClr val="E2E8F0"/>
-          </a:solidFill>
-          <a:ln w="12700">
-            <a:solidFill>
-              <a:srgbClr val="E2E8F0"/>
-            </a:solidFill>
-            <a:prstDash val="solid"/>
-          </a:ln>
-        </p:spPr>
-      </p:sp>
-      <p:sp>
-        <p:nvSpPr>
-          <p:cNvPr id="31" name="Text 29"/>
-          <p:cNvSpPr/>
-          <p:nvPr/>
-        </p:nvSpPr>
-        <p:spPr>
-          <a:xfrm>
-            <a:off x="365760" y="3273552"/>
-            <a:ext cx="1371600" cy="658368"/>
+              <a:t>per</a:t>
+            </a:r>
+            <a:endParaRPr lang="en-US" sz="1400" dirty="0"/>
+          </a:p>
+        </p:txBody>
+      </p:sp>
+      <p:sp>
+        <p:nvSpPr>
+          <p:cNvPr id="27" name="Text 25"/>
+          <p:cNvSpPr/>
+          <p:nvPr/>
+        </p:nvSpPr>
+        <p:spPr>
+          <a:xfrm>
+            <a:off x="4645152" y="3364992"/>
+            <a:ext cx="1097280" cy="475488"/>
           </a:xfrm>
           <a:prstGeom prst="rect">
             <a:avLst/>
@@ -30084,56 +29504,29 @@
               <a:buNone/>
             </a:pPr>
             <a:r>
-              <a:rPr lang="en-US" sz="1100" b="1" dirty="0">
-                <a:solidFill>
-                  <a:srgbClr val="475569"/>
+              <a:rPr lang="en-US" sz="1600" b="1" dirty="0">
+                <a:solidFill>
+                  <a:srgbClr val="0D9488"/>
                 </a:solidFill>
                 <a:latin typeface="Trebuchet MS" pitchFamily="34" charset="0"/>
                 <a:ea typeface="Trebuchet MS" pitchFamily="34" charset="-122"/>
                 <a:cs typeface="Trebuchet MS" pitchFamily="34" charset="-120"/>
               </a:rPr>
-              <a:t>Syllables</a:t>
-            </a:r>
-            <a:endParaRPr lang="en-US" sz="1100" dirty="0"/>
-          </a:p>
-        </p:txBody>
-      </p:sp>
-      <p:sp>
-        <p:nvSpPr>
-          <p:cNvPr id="32" name="Shape 30"/>
-          <p:cNvSpPr/>
-          <p:nvPr/>
-        </p:nvSpPr>
-        <p:spPr>
-          <a:xfrm>
-            <a:off x="1874520" y="3273552"/>
-            <a:ext cx="6903720" cy="658368"/>
-          </a:xfrm>
-          <a:prstGeom prst="rect">
-            <a:avLst>
-              <a:gd name="adj" fmla="val 8333"/>
-            </a:avLst>
-          </a:prstGeom>
-          <a:solidFill>
-            <a:srgbClr val="CCFBF1"/>
-          </a:solidFill>
-          <a:ln w="12700">
-            <a:solidFill>
-              <a:srgbClr val="0D9488"/>
-            </a:solidFill>
-            <a:prstDash val="solid"/>
-          </a:ln>
-        </p:spPr>
-      </p:sp>
-      <p:sp>
-        <p:nvSpPr>
-          <p:cNvPr id="33" name="Shape 31"/>
-          <p:cNvSpPr/>
-          <p:nvPr/>
-        </p:nvSpPr>
-        <p:spPr>
-          <a:xfrm>
-            <a:off x="2313432" y="3364992"/>
+              <a:t>·</a:t>
+            </a:r>
+            <a:endParaRPr lang="en-US" sz="1600" dirty="0"/>
+          </a:p>
+        </p:txBody>
+      </p:sp>
+      <p:sp>
+        <p:nvSpPr>
+          <p:cNvPr id="28" name="Shape 26"/>
+          <p:cNvSpPr/>
+          <p:nvPr/>
+        </p:nvSpPr>
+        <p:spPr>
+          <a:xfrm>
+            <a:off x="5742432" y="3364992"/>
             <a:ext cx="1645920" cy="475488"/>
           </a:xfrm>
           <a:prstGeom prst="rect">
@@ -30154,13 +29547,13 @@
       </p:sp>
       <p:sp>
         <p:nvSpPr>
-          <p:cNvPr id="34" name="Text 32"/>
-          <p:cNvSpPr/>
-          <p:nvPr/>
-        </p:nvSpPr>
-        <p:spPr>
-          <a:xfrm>
-            <a:off x="2313432" y="3364992"/>
+          <p:cNvPr id="29" name="Text 27"/>
+          <p:cNvSpPr/>
+          <p:nvPr/>
+        </p:nvSpPr>
+        <p:spPr>
+          <a:xfrm>
+            <a:off x="5742432" y="3364992"/>
             <a:ext cx="1645920" cy="475488"/>
           </a:xfrm>
           <a:prstGeom prst="rect">
@@ -30185,7 +29578,7 @@
                 <a:ea typeface="Trebuchet MS" pitchFamily="34" charset="-122"/>
                 <a:cs typeface="Trebuchet MS" pitchFamily="34" charset="-120"/>
               </a:rPr>
-              <a:t>com</a:t>
+              <a:t>mit</a:t>
             </a:r>
             <a:endParaRPr lang="en-US" sz="1400" dirty="0"/>
           </a:p>
@@ -30193,14 +29586,41 @@
       </p:sp>
       <p:sp>
         <p:nvSpPr>
-          <p:cNvPr id="35" name="Text 33"/>
-          <p:cNvSpPr/>
-          <p:nvPr/>
-        </p:nvSpPr>
-        <p:spPr>
-          <a:xfrm>
-            <a:off x="3959352" y="3364992"/>
-            <a:ext cx="411480" cy="475488"/>
+          <p:cNvPr id="30" name="Shape 28"/>
+          <p:cNvSpPr/>
+          <p:nvPr/>
+        </p:nvSpPr>
+        <p:spPr>
+          <a:xfrm>
+            <a:off x="365760" y="4096512"/>
+            <a:ext cx="1371600" cy="804672"/>
+          </a:xfrm>
+          <a:prstGeom prst="rect">
+            <a:avLst>
+              <a:gd name="adj" fmla="val 6818"/>
+            </a:avLst>
+          </a:prstGeom>
+          <a:solidFill>
+            <a:srgbClr val="E2E8F0"/>
+          </a:solidFill>
+          <a:ln w="12700">
+            <a:solidFill>
+              <a:srgbClr val="E2E8F0"/>
+            </a:solidFill>
+            <a:prstDash val="solid"/>
+          </a:ln>
+        </p:spPr>
+      </p:sp>
+      <p:sp>
+        <p:nvSpPr>
+          <p:cNvPr id="31" name="Text 29"/>
+          <p:cNvSpPr/>
+          <p:nvPr/>
+        </p:nvSpPr>
+        <p:spPr>
+          <a:xfrm>
+            <a:off x="365760" y="4096512"/>
+            <a:ext cx="1371600" cy="804672"/>
           </a:xfrm>
           <a:prstGeom prst="rect">
             <a:avLst/>
@@ -30216,201 +29636,30 @@
               <a:buNone/>
             </a:pPr>
             <a:r>
-              <a:rPr lang="en-US" sz="1600" b="1" dirty="0">
-                <a:solidFill>
-                  <a:srgbClr val="0D9488"/>
+              <a:rPr lang="en-US" sz="1100" b="1" dirty="0">
+                <a:solidFill>
+                  <a:srgbClr val="475569"/>
                 </a:solidFill>
                 <a:latin typeface="Trebuchet MS" pitchFamily="34" charset="0"/>
                 <a:ea typeface="Trebuchet MS" pitchFamily="34" charset="-122"/>
                 <a:cs typeface="Trebuchet MS" pitchFamily="34" charset="-120"/>
               </a:rPr>
-              <a:t>·</a:t>
-            </a:r>
-            <a:endParaRPr lang="en-US" sz="1600" dirty="0"/>
-          </a:p>
-        </p:txBody>
-      </p:sp>
-      <p:sp>
-        <p:nvSpPr>
-          <p:cNvPr id="36" name="Shape 34"/>
-          <p:cNvSpPr/>
-          <p:nvPr/>
-        </p:nvSpPr>
-        <p:spPr>
-          <a:xfrm>
-            <a:off x="4370832" y="3364992"/>
-            <a:ext cx="1645920" cy="475488"/>
-          </a:xfrm>
-          <a:prstGeom prst="rect">
-            <a:avLst>
-              <a:gd name="adj" fmla="val 9615"/>
-            </a:avLst>
-          </a:prstGeom>
-          <a:solidFill>
-            <a:srgbClr val="FFFFFF"/>
-          </a:solidFill>
-          <a:ln w="12700">
-            <a:solidFill>
-              <a:srgbClr val="0D9488"/>
-            </a:solidFill>
-            <a:prstDash val="solid"/>
-          </a:ln>
-        </p:spPr>
-      </p:sp>
-      <p:sp>
-        <p:nvSpPr>
-          <p:cNvPr id="37" name="Text 35"/>
-          <p:cNvSpPr/>
-          <p:nvPr/>
-        </p:nvSpPr>
-        <p:spPr>
-          <a:xfrm>
-            <a:off x="4370832" y="3364992"/>
-            <a:ext cx="1645920" cy="475488"/>
-          </a:xfrm>
-          <a:prstGeom prst="rect">
-            <a:avLst/>
-          </a:prstGeom>
-          <a:noFill/>
-          <a:ln/>
-        </p:spPr>
-        <p:txBody>
-          <a:bodyPr wrap="square" lIns="0" tIns="0" rIns="0" bIns="0" rtlCol="0" anchor="ctr"/>
-          <a:lstStyle/>
-          <a:p>
-            <a:pPr algn="ctr" indent="0" marL="0">
-              <a:buNone/>
-            </a:pPr>
-            <a:r>
-              <a:rPr lang="en-US" sz="1400" b="1" dirty="0">
-                <a:solidFill>
-                  <a:srgbClr val="0D9488"/>
-                </a:solidFill>
-                <a:latin typeface="Trebuchet MS" pitchFamily="34" charset="0"/>
-                <a:ea typeface="Trebuchet MS" pitchFamily="34" charset="-122"/>
-                <a:cs typeface="Trebuchet MS" pitchFamily="34" charset="-120"/>
-              </a:rPr>
-              <a:t>mit</a:t>
-            </a:r>
-            <a:endParaRPr lang="en-US" sz="1400" dirty="0"/>
-          </a:p>
-        </p:txBody>
-      </p:sp>
-      <p:sp>
-        <p:nvSpPr>
-          <p:cNvPr id="38" name="Text 36"/>
-          <p:cNvSpPr/>
-          <p:nvPr/>
-        </p:nvSpPr>
-        <p:spPr>
-          <a:xfrm>
-            <a:off x="6016752" y="3364992"/>
-            <a:ext cx="411480" cy="475488"/>
-          </a:xfrm>
-          <a:prstGeom prst="rect">
-            <a:avLst/>
-          </a:prstGeom>
-          <a:noFill/>
-          <a:ln/>
-        </p:spPr>
-        <p:txBody>
-          <a:bodyPr wrap="square" lIns="0" tIns="0" rIns="0" bIns="0" rtlCol="0" anchor="ctr"/>
-          <a:lstStyle/>
-          <a:p>
-            <a:pPr algn="ctr" indent="0" marL="0">
-              <a:buNone/>
-            </a:pPr>
-            <a:r>
-              <a:rPr lang="en-US" sz="1600" b="1" dirty="0">
-                <a:solidFill>
-                  <a:srgbClr val="0D9488"/>
-                </a:solidFill>
-                <a:latin typeface="Trebuchet MS" pitchFamily="34" charset="0"/>
-                <a:ea typeface="Trebuchet MS" pitchFamily="34" charset="-122"/>
-                <a:cs typeface="Trebuchet MS" pitchFamily="34" charset="-120"/>
-              </a:rPr>
-              <a:t>·</a:t>
-            </a:r>
-            <a:endParaRPr lang="en-US" sz="1600" dirty="0"/>
-          </a:p>
-        </p:txBody>
-      </p:sp>
-      <p:sp>
-        <p:nvSpPr>
-          <p:cNvPr id="39" name="Shape 37"/>
-          <p:cNvSpPr/>
-          <p:nvPr/>
-        </p:nvSpPr>
-        <p:spPr>
-          <a:xfrm>
-            <a:off x="6428232" y="3364992"/>
-            <a:ext cx="1645920" cy="475488"/>
-          </a:xfrm>
-          <a:prstGeom prst="rect">
-            <a:avLst>
-              <a:gd name="adj" fmla="val 9615"/>
-            </a:avLst>
-          </a:prstGeom>
-          <a:solidFill>
-            <a:srgbClr val="FFFFFF"/>
-          </a:solidFill>
-          <a:ln w="12700">
-            <a:solidFill>
-              <a:srgbClr val="0D9488"/>
-            </a:solidFill>
-            <a:prstDash val="solid"/>
-          </a:ln>
-        </p:spPr>
-      </p:sp>
-      <p:sp>
-        <p:nvSpPr>
-          <p:cNvPr id="40" name="Text 38"/>
-          <p:cNvSpPr/>
-          <p:nvPr/>
-        </p:nvSpPr>
-        <p:spPr>
-          <a:xfrm>
-            <a:off x="6428232" y="3364992"/>
-            <a:ext cx="1645920" cy="475488"/>
-          </a:xfrm>
-          <a:prstGeom prst="rect">
-            <a:avLst/>
-          </a:prstGeom>
-          <a:noFill/>
-          <a:ln/>
-        </p:spPr>
-        <p:txBody>
-          <a:bodyPr wrap="square" lIns="0" tIns="0" rIns="0" bIns="0" rtlCol="0" anchor="ctr"/>
-          <a:lstStyle/>
-          <a:p>
-            <a:pPr algn="ctr" indent="0" marL="0">
-              <a:buNone/>
-            </a:pPr>
-            <a:r>
-              <a:rPr lang="en-US" sz="1400" b="1" dirty="0">
-                <a:solidFill>
-                  <a:srgbClr val="0D9488"/>
-                </a:solidFill>
-                <a:latin typeface="Trebuchet MS" pitchFamily="34" charset="0"/>
-                <a:ea typeface="Trebuchet MS" pitchFamily="34" charset="-122"/>
-                <a:cs typeface="Trebuchet MS" pitchFamily="34" charset="-120"/>
-              </a:rPr>
-              <a:t>ted</a:t>
-            </a:r>
-            <a:endParaRPr lang="en-US" sz="1400" dirty="0"/>
-          </a:p>
-        </p:txBody>
-      </p:sp>
-      <p:sp>
-        <p:nvSpPr>
-          <p:cNvPr id="41" name="Shape 39"/>
-          <p:cNvSpPr/>
-          <p:nvPr/>
-        </p:nvSpPr>
-        <p:spPr>
-          <a:xfrm>
-            <a:off x="365760" y="4096512"/>
-            <a:ext cx="1371600" cy="804672"/>
+              <a:t>Phonemes</a:t>
+            </a:r>
+            <a:endParaRPr lang="en-US" sz="1100" dirty="0"/>
+          </a:p>
+        </p:txBody>
+      </p:sp>
+      <p:sp>
+        <p:nvSpPr>
+          <p:cNvPr id="32" name="Shape 30"/>
+          <p:cNvSpPr/>
+          <p:nvPr/>
+        </p:nvSpPr>
+        <p:spPr>
+          <a:xfrm>
+            <a:off x="1874520" y="4096512"/>
+            <a:ext cx="6903720" cy="804672"/>
           </a:xfrm>
           <a:prstGeom prst="rect">
             <a:avLst>
@@ -30418,85 +29667,19 @@
             </a:avLst>
           </a:prstGeom>
           <a:solidFill>
-            <a:srgbClr val="E2E8F0"/>
+            <a:srgbClr val="F8FAFC"/>
           </a:solidFill>
           <a:ln w="12700">
             <a:solidFill>
               <a:srgbClr val="E2E8F0"/>
             </a:solidFill>
-            <a:prstDash val="solid"/>
-          </a:ln>
-        </p:spPr>
-      </p:sp>
-      <p:sp>
-        <p:nvSpPr>
-          <p:cNvPr id="42" name="Text 40"/>
-          <p:cNvSpPr/>
-          <p:nvPr/>
-        </p:nvSpPr>
-        <p:spPr>
-          <a:xfrm>
-            <a:off x="365760" y="4096512"/>
-            <a:ext cx="1371600" cy="804672"/>
-          </a:xfrm>
-          <a:prstGeom prst="rect">
-            <a:avLst/>
-          </a:prstGeom>
-          <a:noFill/>
-          <a:ln/>
-        </p:spPr>
-        <p:txBody>
-          <a:bodyPr wrap="square" lIns="0" tIns="0" rIns="0" bIns="0" rtlCol="0" anchor="ctr"/>
-          <a:lstStyle/>
-          <a:p>
-            <a:pPr algn="ctr" indent="0" marL="0">
-              <a:buNone/>
-            </a:pPr>
-            <a:r>
-              <a:rPr lang="en-US" sz="1100" b="1" dirty="0">
-                <a:solidFill>
-                  <a:srgbClr val="475569"/>
-                </a:solidFill>
-                <a:latin typeface="Trebuchet MS" pitchFamily="34" charset="0"/>
-                <a:ea typeface="Trebuchet MS" pitchFamily="34" charset="-122"/>
-                <a:cs typeface="Trebuchet MS" pitchFamily="34" charset="-120"/>
-              </a:rPr>
-              <a:t>Phonemes</a:t>
-            </a:r>
-            <a:endParaRPr lang="en-US" sz="1100" dirty="0"/>
-          </a:p>
-        </p:txBody>
-      </p:sp>
-      <p:sp>
-        <p:nvSpPr>
-          <p:cNvPr id="43" name="Shape 41"/>
-          <p:cNvSpPr/>
-          <p:nvPr/>
-        </p:nvSpPr>
-        <p:spPr>
-          <a:xfrm>
-            <a:off x="1874520" y="4096512"/>
-            <a:ext cx="6903720" cy="804672"/>
-          </a:xfrm>
-          <a:prstGeom prst="rect">
-            <a:avLst>
-              <a:gd name="adj" fmla="val 6818"/>
-            </a:avLst>
-          </a:prstGeom>
-          <a:solidFill>
-            <a:srgbClr val="F8FAFC"/>
-          </a:solidFill>
-          <a:ln w="12700">
-            <a:solidFill>
-              <a:srgbClr val="E2E8F0"/>
-            </a:solidFill>
             <a:prstDash val="dash"/>
           </a:ln>
         </p:spPr>
       </p:sp>
       <p:sp>
         <p:nvSpPr>
-          <p:cNvPr id="44" name="Text 42"/>
+          <p:cNvPr id="33" name="Text 31"/>
           <p:cNvSpPr/>
           <p:nvPr/>
         </p:nvSpPr>
@@ -30958,7 +30141,7 @@
                 <a:ea typeface="Trebuchet MS" pitchFamily="34" charset="-122"/>
                 <a:cs typeface="Trebuchet MS" pitchFamily="34" charset="-120"/>
               </a:rPr>
-              <a:t>committed</a:t>
+              <a:t>permit</a:t>
             </a:r>
             <a:endParaRPr lang="en-US" sz="2800" dirty="0"/>
           </a:p>
@@ -31038,8 +30221,8 @@
         </p:nvSpPr>
         <p:spPr>
           <a:xfrm>
-            <a:off x="1989734" y="2258568"/>
-            <a:ext cx="1581912" cy="292608"/>
+            <a:off x="2938272" y="2258568"/>
+            <a:ext cx="1828800" cy="292608"/>
           </a:xfrm>
           <a:prstGeom prst="rect">
             <a:avLst>
@@ -31072,8 +30255,8 @@
         </p:nvSpPr>
         <p:spPr>
           <a:xfrm>
-            <a:off x="1989734" y="2258568"/>
-            <a:ext cx="1581912" cy="292608"/>
+            <a:off x="2938272" y="2258568"/>
+            <a:ext cx="1828800" cy="292608"/>
           </a:xfrm>
           <a:prstGeom prst="rect">
             <a:avLst/>
@@ -31097,7 +30280,7 @@
                 <a:ea typeface="Trebuchet MS" pitchFamily="34" charset="-122"/>
                 <a:cs typeface="Trebuchet MS" pitchFamily="34" charset="-120"/>
               </a:rPr>
-              <a:t>com</a:t>
+              <a:t>per</a:t>
             </a:r>
             <a:endParaRPr lang="en-US" sz="1300" dirty="0"/>
           </a:p>
@@ -31111,8 +30294,8 @@
         </p:nvSpPr>
         <p:spPr>
           <a:xfrm>
-            <a:off x="1989734" y="2569464"/>
-            <a:ext cx="1581912" cy="201168"/>
+            <a:off x="2938272" y="2569464"/>
+            <a:ext cx="1828800" cy="201168"/>
           </a:xfrm>
           <a:prstGeom prst="rect">
             <a:avLst/>
@@ -31136,7 +30319,7 @@
                 <a:ea typeface="Calibri" pitchFamily="34" charset="-122"/>
                 <a:cs typeface="Calibri" pitchFamily="34" charset="-120"/>
               </a:rPr>
-              <a:t>together, with</a:t>
+              <a:t>through, thoroughly</a:t>
             </a:r>
             <a:endParaRPr lang="en-US" sz="850" dirty="0"/>
           </a:p>
@@ -31144,53 +30327,14 @@
       </p:sp>
       <p:sp>
         <p:nvSpPr>
-          <p:cNvPr id="19" name="Text 17"/>
-          <p:cNvSpPr/>
-          <p:nvPr/>
-        </p:nvSpPr>
-        <p:spPr>
-          <a:xfrm>
-            <a:off x="1989734" y="2752344"/>
-            <a:ext cx="1581912" cy="182880"/>
-          </a:xfrm>
-          <a:prstGeom prst="rect">
-            <a:avLst/>
-          </a:prstGeom>
-          <a:noFill/>
-          <a:ln/>
-        </p:spPr>
-        <p:txBody>
-          <a:bodyPr wrap="square" lIns="0" tIns="0" rIns="0" bIns="0" rtlCol="0" anchor="t"/>
-          <a:lstStyle/>
-          <a:p>
-            <a:pPr algn="ctr" indent="0" marL="0">
-              <a:buNone/>
-            </a:pPr>
-            <a:r>
-              <a:rPr lang="en-US" sz="700" i="1" dirty="0">
-                <a:solidFill>
-                  <a:srgbClr val="94A3B8"/>
-                </a:solidFill>
-                <a:latin typeface="Calibri" pitchFamily="34" charset="0"/>
-                <a:ea typeface="Calibri" pitchFamily="34" charset="-122"/>
-                <a:cs typeface="Calibri" pitchFamily="34" charset="-120"/>
-              </a:rPr>
-              <a:t>con → com before 'm'</a:t>
-            </a:r>
-            <a:endParaRPr lang="en-US" sz="700" dirty="0"/>
-          </a:p>
-        </p:txBody>
-      </p:sp>
-      <p:sp>
-        <p:nvSpPr>
-          <p:cNvPr id="20" name="Shape 18"/>
-          <p:cNvSpPr/>
-          <p:nvPr/>
-        </p:nvSpPr>
-        <p:spPr>
-          <a:xfrm>
-            <a:off x="3659429" y="2258568"/>
-            <a:ext cx="1581912" cy="292608"/>
+          <p:cNvPr id="19" name="Shape 17"/>
+          <p:cNvSpPr/>
+          <p:nvPr/>
+        </p:nvSpPr>
+        <p:spPr>
+          <a:xfrm>
+            <a:off x="5803392" y="2258568"/>
+            <a:ext cx="1828800" cy="292608"/>
           </a:xfrm>
           <a:prstGeom prst="rect">
             <a:avLst>
@@ -31217,14 +30361,14 @@
       </p:sp>
       <p:sp>
         <p:nvSpPr>
-          <p:cNvPr id="21" name="Text 19"/>
-          <p:cNvSpPr/>
-          <p:nvPr/>
-        </p:nvSpPr>
-        <p:spPr>
-          <a:xfrm>
-            <a:off x="3659429" y="2258568"/>
-            <a:ext cx="1581912" cy="292608"/>
+          <p:cNvPr id="20" name="Text 18"/>
+          <p:cNvSpPr/>
+          <p:nvPr/>
+        </p:nvSpPr>
+        <p:spPr>
+          <a:xfrm>
+            <a:off x="5803392" y="2258568"/>
+            <a:ext cx="1828800" cy="292608"/>
           </a:xfrm>
           <a:prstGeom prst="rect">
             <a:avLst/>
@@ -31256,14 +30400,14 @@
       </p:sp>
       <p:sp>
         <p:nvSpPr>
-          <p:cNvPr id="22" name="Text 20"/>
-          <p:cNvSpPr/>
-          <p:nvPr/>
-        </p:nvSpPr>
-        <p:spPr>
-          <a:xfrm>
-            <a:off x="3659429" y="2569464"/>
-            <a:ext cx="1581912" cy="201168"/>
+          <p:cNvPr id="21" name="Text 19"/>
+          <p:cNvSpPr/>
+          <p:nvPr/>
+        </p:nvSpPr>
+        <p:spPr>
+          <a:xfrm>
+            <a:off x="5803392" y="2569464"/>
+            <a:ext cx="1828800" cy="201168"/>
           </a:xfrm>
           <a:prstGeom prst="rect">
             <a:avLst/>
@@ -31287,7 +30431,7 @@
                 <a:ea typeface="Calibri" pitchFamily="34" charset="-122"/>
                 <a:cs typeface="Calibri" pitchFamily="34" charset="-120"/>
               </a:rPr>
-              <a:t>send, let go</a:t>
+              <a:t>send</a:t>
             </a:r>
             <a:endParaRPr lang="en-US" sz="850" dirty="0"/>
           </a:p>
@@ -31295,48 +30439,41 @@
       </p:sp>
       <p:sp>
         <p:nvSpPr>
-          <p:cNvPr id="23" name="Shape 21"/>
-          <p:cNvSpPr/>
-          <p:nvPr/>
-        </p:nvSpPr>
-        <p:spPr>
-          <a:xfrm>
-            <a:off x="5329123" y="2258568"/>
-            <a:ext cx="1581912" cy="292608"/>
+          <p:cNvPr id="22" name="Shape 20"/>
+          <p:cNvSpPr/>
+          <p:nvPr/>
+        </p:nvSpPr>
+        <p:spPr>
+          <a:xfrm>
+            <a:off x="365760" y="3273552"/>
+            <a:ext cx="1371600" cy="658368"/>
           </a:xfrm>
           <a:prstGeom prst="rect">
             <a:avLst>
-              <a:gd name="adj" fmla="val 25000"/>
+              <a:gd name="adj" fmla="val 8333"/>
             </a:avLst>
           </a:prstGeom>
           <a:solidFill>
-            <a:srgbClr val="FCE7F3"/>
-          </a:solidFill>
-          <a:ln w="19050">
-            <a:solidFill>
-              <a:srgbClr val="DB2777"/>
-            </a:solidFill>
-            <a:prstDash val="solid"/>
-          </a:ln>
-          <a:effectLst>
-            <a:outerShdw sx="100000" sy="100000" kx="0" ky="0" algn="bl" rotWithShape="0" blurRad="101600" dist="38100" dir="8100000">
-              <a:srgbClr val="000000">
-                <a:alpha val="12000"/>
-              </a:srgbClr>
-            </a:outerShdw>
-          </a:effectLst>
-        </p:spPr>
-      </p:sp>
-      <p:sp>
-        <p:nvSpPr>
-          <p:cNvPr id="24" name="Text 22"/>
-          <p:cNvSpPr/>
-          <p:nvPr/>
-        </p:nvSpPr>
-        <p:spPr>
-          <a:xfrm>
-            <a:off x="5329123" y="2258568"/>
-            <a:ext cx="1581912" cy="292608"/>
+            <a:srgbClr val="E2E8F0"/>
+          </a:solidFill>
+          <a:ln w="12700">
+            <a:solidFill>
+              <a:srgbClr val="E2E8F0"/>
+            </a:solidFill>
+            <a:prstDash val="solid"/>
+          </a:ln>
+        </p:spPr>
+      </p:sp>
+      <p:sp>
+        <p:nvSpPr>
+          <p:cNvPr id="23" name="Text 21"/>
+          <p:cNvSpPr/>
+          <p:nvPr/>
+        </p:nvSpPr>
+        <p:spPr>
+          <a:xfrm>
+            <a:off x="365760" y="3273552"/>
+            <a:ext cx="1371600" cy="658368"/>
           </a:xfrm>
           <a:prstGeom prst="rect">
             <a:avLst/>
@@ -31352,58 +30489,73 @@
               <a:buNone/>
             </a:pPr>
             <a:r>
-              <a:rPr lang="en-US" sz="1300" b="1" dirty="0">
-                <a:solidFill>
-                  <a:srgbClr val="9D174D"/>
+              <a:rPr lang="en-US" sz="1100" b="1" dirty="0">
+                <a:solidFill>
+                  <a:srgbClr val="475569"/>
                 </a:solidFill>
                 <a:latin typeface="Trebuchet MS" pitchFamily="34" charset="0"/>
                 <a:ea typeface="Trebuchet MS" pitchFamily="34" charset="-122"/>
                 <a:cs typeface="Trebuchet MS" pitchFamily="34" charset="-120"/>
               </a:rPr>
-              <a:t>t</a:t>
-            </a:r>
-            <a:endParaRPr lang="en-US" sz="1300" dirty="0"/>
-          </a:p>
-        </p:txBody>
-      </p:sp>
-      <p:sp>
-        <p:nvSpPr>
-          <p:cNvPr id="25" name="Text 23"/>
-          <p:cNvSpPr/>
-          <p:nvPr/>
-        </p:nvSpPr>
-        <p:spPr>
-          <a:xfrm>
-            <a:off x="5329123" y="2569464"/>
-            <a:ext cx="1581912" cy="201168"/>
-          </a:xfrm>
-          <a:prstGeom prst="rect">
-            <a:avLst/>
-          </a:prstGeom>
-          <a:noFill/>
-          <a:ln/>
-        </p:spPr>
-        <p:txBody>
-          <a:bodyPr wrap="square" lIns="0" tIns="0" rIns="0" bIns="0" rtlCol="0" anchor="t"/>
-          <a:lstStyle/>
-          <a:p>
-            <a:pPr algn="ctr" indent="0" marL="0">
-              <a:buNone/>
-            </a:pPr>
-            <a:r>
-              <a:rPr lang="en-US" sz="850" dirty="0">
-                <a:solidFill>
-                  <a:srgbClr val="475569"/>
-                </a:solidFill>
-                <a:latin typeface="Calibri" pitchFamily="34" charset="0"/>
-                <a:ea typeface="Calibri" pitchFamily="34" charset="-122"/>
-                <a:cs typeface="Calibri" pitchFamily="34" charset="-120"/>
-              </a:rPr>
-              <a:t>doubled consonant before suffix</a:t>
-            </a:r>
-            <a:endParaRPr lang="en-US" sz="850" dirty="0"/>
-          </a:p>
-        </p:txBody>
+              <a:t>Syllables</a:t>
+            </a:r>
+            <a:endParaRPr lang="en-US" sz="1100" dirty="0"/>
+          </a:p>
+        </p:txBody>
+      </p:sp>
+      <p:sp>
+        <p:nvSpPr>
+          <p:cNvPr id="24" name="Shape 22"/>
+          <p:cNvSpPr/>
+          <p:nvPr/>
+        </p:nvSpPr>
+        <p:spPr>
+          <a:xfrm>
+            <a:off x="1874520" y="3273552"/>
+            <a:ext cx="6903720" cy="658368"/>
+          </a:xfrm>
+          <a:prstGeom prst="rect">
+            <a:avLst>
+              <a:gd name="adj" fmla="val 8333"/>
+            </a:avLst>
+          </a:prstGeom>
+          <a:solidFill>
+            <a:srgbClr val="CCFBF1"/>
+          </a:solidFill>
+          <a:ln w="12700">
+            <a:solidFill>
+              <a:srgbClr val="0D9488"/>
+            </a:solidFill>
+            <a:prstDash val="solid"/>
+          </a:ln>
+        </p:spPr>
+      </p:sp>
+      <p:sp>
+        <p:nvSpPr>
+          <p:cNvPr id="25" name="Shape 23"/>
+          <p:cNvSpPr/>
+          <p:nvPr/>
+        </p:nvSpPr>
+        <p:spPr>
+          <a:xfrm>
+            <a:off x="2999232" y="3364992"/>
+            <a:ext cx="1645920" cy="475488"/>
+          </a:xfrm>
+          <a:prstGeom prst="rect">
+            <a:avLst>
+              <a:gd name="adj" fmla="val 9615"/>
+            </a:avLst>
+          </a:prstGeom>
+          <a:solidFill>
+            <a:srgbClr val="FFFFFF"/>
+          </a:solidFill>
+          <a:ln w="12700">
+            <a:solidFill>
+              <a:srgbClr val="0D9488"/>
+            </a:solidFill>
+            <a:prstDash val="solid"/>
+          </a:ln>
+        </p:spPr>
       </p:sp>
       <p:sp>
         <p:nvSpPr>
@@ -31413,81 +30565,8 @@
         </p:nvSpPr>
         <p:spPr>
           <a:xfrm>
-            <a:off x="5329123" y="2752344"/>
-            <a:ext cx="1581912" cy="182880"/>
-          </a:xfrm>
-          <a:prstGeom prst="rect">
-            <a:avLst/>
-          </a:prstGeom>
-          <a:noFill/>
-          <a:ln/>
-        </p:spPr>
-        <p:txBody>
-          <a:bodyPr wrap="square" lIns="0" tIns="0" rIns="0" bIns="0" rtlCol="0" anchor="t"/>
-          <a:lstStyle/>
-          <a:p>
-            <a:pPr algn="ctr" indent="0" marL="0">
-              <a:buNone/>
-            </a:pPr>
-            <a:r>
-              <a:rPr lang="en-US" sz="700" i="1" dirty="0">
-                <a:solidFill>
-                  <a:srgbClr val="94A3B8"/>
-                </a:solidFill>
-                <a:latin typeface="Calibri" pitchFamily="34" charset="0"/>
-                <a:ea typeface="Calibri" pitchFamily="34" charset="-122"/>
-                <a:cs typeface="Calibri" pitchFamily="34" charset="-120"/>
-              </a:rPr>
-              <a:t>final 't' doubled before vowel suffix</a:t>
-            </a:r>
-            <a:endParaRPr lang="en-US" sz="700" dirty="0"/>
-          </a:p>
-        </p:txBody>
-      </p:sp>
-      <p:sp>
-        <p:nvSpPr>
-          <p:cNvPr id="27" name="Shape 25"/>
-          <p:cNvSpPr/>
-          <p:nvPr/>
-        </p:nvSpPr>
-        <p:spPr>
-          <a:xfrm>
-            <a:off x="6998818" y="2258568"/>
-            <a:ext cx="1581912" cy="292608"/>
-          </a:xfrm>
-          <a:prstGeom prst="rect">
-            <a:avLst>
-              <a:gd name="adj" fmla="val 25000"/>
-            </a:avLst>
-          </a:prstGeom>
-          <a:solidFill>
-            <a:srgbClr val="FCE7F3"/>
-          </a:solidFill>
-          <a:ln w="19050">
-            <a:solidFill>
-              <a:srgbClr val="DB2777"/>
-            </a:solidFill>
-            <a:prstDash val="solid"/>
-          </a:ln>
-          <a:effectLst>
-            <a:outerShdw sx="100000" sy="100000" kx="0" ky="0" algn="bl" rotWithShape="0" blurRad="101600" dist="38100" dir="8100000">
-              <a:srgbClr val="000000">
-                <a:alpha val="12000"/>
-              </a:srgbClr>
-            </a:outerShdw>
-          </a:effectLst>
-        </p:spPr>
-      </p:sp>
-      <p:sp>
-        <p:nvSpPr>
-          <p:cNvPr id="28" name="Text 26"/>
-          <p:cNvSpPr/>
-          <p:nvPr/>
-        </p:nvSpPr>
-        <p:spPr>
-          <a:xfrm>
-            <a:off x="6998818" y="2258568"/>
-            <a:ext cx="1581912" cy="292608"/>
+            <a:off x="2999232" y="3364992"/>
+            <a:ext cx="1645920" cy="475488"/>
           </a:xfrm>
           <a:prstGeom prst="rect">
             <a:avLst/>
@@ -31503,19 +30582,85 @@
               <a:buNone/>
             </a:pPr>
             <a:r>
-              <a:rPr lang="en-US" sz="1300" b="1" dirty="0">
-                <a:solidFill>
-                  <a:srgbClr val="9D174D"/>
+              <a:rPr lang="en-US" sz="1400" b="1" dirty="0">
+                <a:solidFill>
+                  <a:srgbClr val="0D9488"/>
                 </a:solidFill>
                 <a:latin typeface="Trebuchet MS" pitchFamily="34" charset="0"/>
                 <a:ea typeface="Trebuchet MS" pitchFamily="34" charset="-122"/>
                 <a:cs typeface="Trebuchet MS" pitchFamily="34" charset="-120"/>
               </a:rPr>
-              <a:t>ed</a:t>
-            </a:r>
-            <a:endParaRPr lang="en-US" sz="1300" dirty="0"/>
-          </a:p>
-        </p:txBody>
+              <a:t>per</a:t>
+            </a:r>
+            <a:endParaRPr lang="en-US" sz="1400" dirty="0"/>
+          </a:p>
+        </p:txBody>
+      </p:sp>
+      <p:sp>
+        <p:nvSpPr>
+          <p:cNvPr id="27" name="Text 25"/>
+          <p:cNvSpPr/>
+          <p:nvPr/>
+        </p:nvSpPr>
+        <p:spPr>
+          <a:xfrm>
+            <a:off x="4645152" y="3364992"/>
+            <a:ext cx="1097280" cy="475488"/>
+          </a:xfrm>
+          <a:prstGeom prst="rect">
+            <a:avLst/>
+          </a:prstGeom>
+          <a:noFill/>
+          <a:ln/>
+        </p:spPr>
+        <p:txBody>
+          <a:bodyPr wrap="square" lIns="0" tIns="0" rIns="0" bIns="0" rtlCol="0" anchor="ctr"/>
+          <a:lstStyle/>
+          <a:p>
+            <a:pPr algn="ctr" indent="0" marL="0">
+              <a:buNone/>
+            </a:pPr>
+            <a:r>
+              <a:rPr lang="en-US" sz="1600" b="1" dirty="0">
+                <a:solidFill>
+                  <a:srgbClr val="0D9488"/>
+                </a:solidFill>
+                <a:latin typeface="Trebuchet MS" pitchFamily="34" charset="0"/>
+                <a:ea typeface="Trebuchet MS" pitchFamily="34" charset="-122"/>
+                <a:cs typeface="Trebuchet MS" pitchFamily="34" charset="-120"/>
+              </a:rPr>
+              <a:t>·</a:t>
+            </a:r>
+            <a:endParaRPr lang="en-US" sz="1600" dirty="0"/>
+          </a:p>
+        </p:txBody>
+      </p:sp>
+      <p:sp>
+        <p:nvSpPr>
+          <p:cNvPr id="28" name="Shape 26"/>
+          <p:cNvSpPr/>
+          <p:nvPr/>
+        </p:nvSpPr>
+        <p:spPr>
+          <a:xfrm>
+            <a:off x="5742432" y="3364992"/>
+            <a:ext cx="1645920" cy="475488"/>
+          </a:xfrm>
+          <a:prstGeom prst="rect">
+            <a:avLst>
+              <a:gd name="adj" fmla="val 9615"/>
+            </a:avLst>
+          </a:prstGeom>
+          <a:solidFill>
+            <a:srgbClr val="FFFFFF"/>
+          </a:solidFill>
+          <a:ln w="12700">
+            <a:solidFill>
+              <a:srgbClr val="0D9488"/>
+            </a:solidFill>
+            <a:prstDash val="solid"/>
+          </a:ln>
+        </p:spPr>
       </p:sp>
       <p:sp>
         <p:nvSpPr>
@@ -31525,47 +30670,113 @@
         </p:nvSpPr>
         <p:spPr>
           <a:xfrm>
-            <a:off x="6998818" y="2569464"/>
-            <a:ext cx="1581912" cy="201168"/>
-          </a:xfrm>
-          <a:prstGeom prst="rect">
-            <a:avLst/>
-          </a:prstGeom>
-          <a:noFill/>
-          <a:ln/>
-        </p:spPr>
-        <p:txBody>
-          <a:bodyPr wrap="square" lIns="0" tIns="0" rIns="0" bIns="0" rtlCol="0" anchor="t"/>
-          <a:lstStyle/>
-          <a:p>
-            <a:pPr algn="ctr" indent="0" marL="0">
-              <a:buNone/>
-            </a:pPr>
-            <a:r>
-              <a:rPr lang="en-US" sz="850" dirty="0">
+            <a:off x="5742432" y="3364992"/>
+            <a:ext cx="1645920" cy="475488"/>
+          </a:xfrm>
+          <a:prstGeom prst="rect">
+            <a:avLst/>
+          </a:prstGeom>
+          <a:noFill/>
+          <a:ln/>
+        </p:spPr>
+        <p:txBody>
+          <a:bodyPr wrap="square" lIns="0" tIns="0" rIns="0" bIns="0" rtlCol="0" anchor="ctr"/>
+          <a:lstStyle/>
+          <a:p>
+            <a:pPr algn="ctr" indent="0" marL="0">
+              <a:buNone/>
+            </a:pPr>
+            <a:r>
+              <a:rPr lang="en-US" sz="1400" b="1" dirty="0">
+                <a:solidFill>
+                  <a:srgbClr val="0D9488"/>
+                </a:solidFill>
+                <a:latin typeface="Trebuchet MS" pitchFamily="34" charset="0"/>
+                <a:ea typeface="Trebuchet MS" pitchFamily="34" charset="-122"/>
+                <a:cs typeface="Trebuchet MS" pitchFamily="34" charset="-120"/>
+              </a:rPr>
+              <a:t>mit</a:t>
+            </a:r>
+            <a:endParaRPr lang="en-US" sz="1400" dirty="0"/>
+          </a:p>
+        </p:txBody>
+      </p:sp>
+      <p:sp>
+        <p:nvSpPr>
+          <p:cNvPr id="30" name="Shape 28"/>
+          <p:cNvSpPr/>
+          <p:nvPr/>
+        </p:nvSpPr>
+        <p:spPr>
+          <a:xfrm>
+            <a:off x="365760" y="4096512"/>
+            <a:ext cx="1371600" cy="804672"/>
+          </a:xfrm>
+          <a:prstGeom prst="rect">
+            <a:avLst>
+              <a:gd name="adj" fmla="val 6818"/>
+            </a:avLst>
+          </a:prstGeom>
+          <a:solidFill>
+            <a:srgbClr val="E2E8F0"/>
+          </a:solidFill>
+          <a:ln w="12700">
+            <a:solidFill>
+              <a:srgbClr val="E2E8F0"/>
+            </a:solidFill>
+            <a:prstDash val="solid"/>
+          </a:ln>
+        </p:spPr>
+      </p:sp>
+      <p:sp>
+        <p:nvSpPr>
+          <p:cNvPr id="31" name="Text 29"/>
+          <p:cNvSpPr/>
+          <p:nvPr/>
+        </p:nvSpPr>
+        <p:spPr>
+          <a:xfrm>
+            <a:off x="365760" y="4096512"/>
+            <a:ext cx="1371600" cy="804672"/>
+          </a:xfrm>
+          <a:prstGeom prst="rect">
+            <a:avLst/>
+          </a:prstGeom>
+          <a:noFill/>
+          <a:ln/>
+        </p:spPr>
+        <p:txBody>
+          <a:bodyPr wrap="square" lIns="0" tIns="0" rIns="0" bIns="0" rtlCol="0" anchor="ctr"/>
+          <a:lstStyle/>
+          <a:p>
+            <a:pPr algn="ctr" indent="0" marL="0">
+              <a:buNone/>
+            </a:pPr>
+            <a:r>
+              <a:rPr lang="en-US" sz="1100" b="1" dirty="0">
                 <a:solidFill>
                   <a:srgbClr val="475569"/>
                 </a:solidFill>
-                <a:latin typeface="Calibri" pitchFamily="34" charset="0"/>
-                <a:ea typeface="Calibri" pitchFamily="34" charset="-122"/>
-                <a:cs typeface="Calibri" pitchFamily="34" charset="-120"/>
-              </a:rPr>
-              <a:t>past tense</a:t>
-            </a:r>
-            <a:endParaRPr lang="en-US" sz="850" dirty="0"/>
-          </a:p>
-        </p:txBody>
-      </p:sp>
-      <p:sp>
-        <p:nvSpPr>
-          <p:cNvPr id="30" name="Shape 28"/>
-          <p:cNvSpPr/>
-          <p:nvPr/>
-        </p:nvSpPr>
-        <p:spPr>
-          <a:xfrm>
-            <a:off x="365760" y="3273552"/>
-            <a:ext cx="1371600" cy="658368"/>
+                <a:latin typeface="Trebuchet MS" pitchFamily="34" charset="0"/>
+                <a:ea typeface="Trebuchet MS" pitchFamily="34" charset="-122"/>
+                <a:cs typeface="Trebuchet MS" pitchFamily="34" charset="-120"/>
+              </a:rPr>
+              <a:t>Phonemes</a:t>
+            </a:r>
+            <a:endParaRPr lang="en-US" sz="1100" dirty="0"/>
+          </a:p>
+        </p:txBody>
+      </p:sp>
+      <p:sp>
+        <p:nvSpPr>
+          <p:cNvPr id="32" name="Shape 30"/>
+          <p:cNvSpPr/>
+          <p:nvPr/>
+        </p:nvSpPr>
+        <p:spPr>
+          <a:xfrm>
+            <a:off x="1874520" y="4096512"/>
+            <a:ext cx="6903720" cy="658368"/>
           </a:xfrm>
           <a:prstGeom prst="rect">
             <a:avLst>
@@ -31573,26 +30784,53 @@
             </a:avLst>
           </a:prstGeom>
           <a:solidFill>
-            <a:srgbClr val="E2E8F0"/>
-          </a:solidFill>
-          <a:ln w="12700">
-            <a:solidFill>
-              <a:srgbClr val="E2E8F0"/>
-            </a:solidFill>
-            <a:prstDash val="solid"/>
-          </a:ln>
-        </p:spPr>
-      </p:sp>
-      <p:sp>
-        <p:nvSpPr>
-          <p:cNvPr id="31" name="Text 29"/>
-          <p:cNvSpPr/>
-          <p:nvPr/>
-        </p:nvSpPr>
-        <p:spPr>
-          <a:xfrm>
-            <a:off x="365760" y="3273552"/>
-            <a:ext cx="1371600" cy="658368"/>
+            <a:srgbClr val="FCE7F3"/>
+          </a:solidFill>
+          <a:ln w="12700">
+            <a:solidFill>
+              <a:srgbClr val="DB2777"/>
+            </a:solidFill>
+            <a:prstDash val="solid"/>
+          </a:ln>
+        </p:spPr>
+      </p:sp>
+      <p:sp>
+        <p:nvSpPr>
+          <p:cNvPr id="33" name="Shape 31"/>
+          <p:cNvSpPr/>
+          <p:nvPr/>
+        </p:nvSpPr>
+        <p:spPr>
+          <a:xfrm>
+            <a:off x="2427732" y="4169664"/>
+            <a:ext cx="685800" cy="475488"/>
+          </a:xfrm>
+          <a:prstGeom prst="rect">
+            <a:avLst>
+              <a:gd name="adj" fmla="val 7692"/>
+            </a:avLst>
+          </a:prstGeom>
+          <a:solidFill>
+            <a:srgbClr val="FFFFFF"/>
+          </a:solidFill>
+          <a:ln w="12700">
+            <a:solidFill>
+              <a:srgbClr val="DB2777"/>
+            </a:solidFill>
+            <a:prstDash val="solid"/>
+          </a:ln>
+        </p:spPr>
+      </p:sp>
+      <p:sp>
+        <p:nvSpPr>
+          <p:cNvPr id="34" name="Text 32"/>
+          <p:cNvSpPr/>
+          <p:nvPr/>
+        </p:nvSpPr>
+        <p:spPr>
+          <a:xfrm>
+            <a:off x="2427732" y="4169664"/>
+            <a:ext cx="685800" cy="475488"/>
           </a:xfrm>
           <a:prstGeom prst="rect">
             <a:avLst/>
@@ -31608,84 +30846,57 @@
               <a:buNone/>
             </a:pPr>
             <a:r>
-              <a:rPr lang="en-US" sz="1100" b="1" dirty="0">
-                <a:solidFill>
-                  <a:srgbClr val="475569"/>
+              <a:rPr lang="en-US" sz="900" b="1" dirty="0">
+                <a:solidFill>
+                  <a:srgbClr val="9D174D"/>
                 </a:solidFill>
                 <a:latin typeface="Trebuchet MS" pitchFamily="34" charset="0"/>
                 <a:ea typeface="Trebuchet MS" pitchFamily="34" charset="-122"/>
                 <a:cs typeface="Trebuchet MS" pitchFamily="34" charset="-120"/>
               </a:rPr>
-              <a:t>Syllables</a:t>
-            </a:r>
-            <a:endParaRPr lang="en-US" sz="1100" dirty="0"/>
-          </a:p>
-        </p:txBody>
-      </p:sp>
-      <p:sp>
-        <p:nvSpPr>
-          <p:cNvPr id="32" name="Shape 30"/>
-          <p:cNvSpPr/>
-          <p:nvPr/>
-        </p:nvSpPr>
-        <p:spPr>
-          <a:xfrm>
-            <a:off x="1874520" y="3273552"/>
-            <a:ext cx="6903720" cy="658368"/>
+              <a:t>p</a:t>
+            </a:r>
+            <a:endParaRPr lang="en-US" sz="900" dirty="0"/>
+          </a:p>
+        </p:txBody>
+      </p:sp>
+      <p:sp>
+        <p:nvSpPr>
+          <p:cNvPr id="35" name="Shape 33"/>
+          <p:cNvSpPr/>
+          <p:nvPr/>
+        </p:nvSpPr>
+        <p:spPr>
+          <a:xfrm>
+            <a:off x="3639312" y="4169664"/>
+            <a:ext cx="685800" cy="475488"/>
           </a:xfrm>
           <a:prstGeom prst="rect">
             <a:avLst>
-              <a:gd name="adj" fmla="val 8333"/>
+              <a:gd name="adj" fmla="val 7692"/>
             </a:avLst>
           </a:prstGeom>
           <a:solidFill>
-            <a:srgbClr val="CCFBF1"/>
-          </a:solidFill>
-          <a:ln w="12700">
-            <a:solidFill>
-              <a:srgbClr val="0D9488"/>
-            </a:solidFill>
-            <a:prstDash val="solid"/>
-          </a:ln>
-        </p:spPr>
-      </p:sp>
-      <p:sp>
-        <p:nvSpPr>
-          <p:cNvPr id="33" name="Shape 31"/>
-          <p:cNvSpPr/>
-          <p:nvPr/>
-        </p:nvSpPr>
-        <p:spPr>
-          <a:xfrm>
-            <a:off x="2313432" y="3364992"/>
-            <a:ext cx="1645920" cy="475488"/>
-          </a:xfrm>
-          <a:prstGeom prst="rect">
-            <a:avLst>
-              <a:gd name="adj" fmla="val 9615"/>
-            </a:avLst>
-          </a:prstGeom>
-          <a:solidFill>
             <a:srgbClr val="FFFFFF"/>
           </a:solidFill>
           <a:ln w="12700">
             <a:solidFill>
-              <a:srgbClr val="0D9488"/>
-            </a:solidFill>
-            <a:prstDash val="solid"/>
-          </a:ln>
-        </p:spPr>
-      </p:sp>
-      <p:sp>
-        <p:nvSpPr>
-          <p:cNvPr id="34" name="Text 32"/>
-          <p:cNvSpPr/>
-          <p:nvPr/>
-        </p:nvSpPr>
-        <p:spPr>
-          <a:xfrm>
-            <a:off x="2313432" y="3364992"/>
-            <a:ext cx="1645920" cy="475488"/>
+              <a:srgbClr val="DB2777"/>
+            </a:solidFill>
+            <a:prstDash val="solid"/>
+          </a:ln>
+        </p:spPr>
+      </p:sp>
+      <p:sp>
+        <p:nvSpPr>
+          <p:cNvPr id="36" name="Text 34"/>
+          <p:cNvSpPr/>
+          <p:nvPr/>
+        </p:nvSpPr>
+        <p:spPr>
+          <a:xfrm>
+            <a:off x="3639312" y="4169664"/>
+            <a:ext cx="685800" cy="475488"/>
           </a:xfrm>
           <a:prstGeom prst="rect">
             <a:avLst/>
@@ -31701,30 +30912,57 @@
               <a:buNone/>
             </a:pPr>
             <a:r>
-              <a:rPr lang="en-US" sz="1400" b="1" dirty="0">
-                <a:solidFill>
-                  <a:srgbClr val="0D9488"/>
+              <a:rPr lang="en-US" sz="900" b="1" dirty="0">
+                <a:solidFill>
+                  <a:srgbClr val="9D174D"/>
                 </a:solidFill>
                 <a:latin typeface="Trebuchet MS" pitchFamily="34" charset="0"/>
                 <a:ea typeface="Trebuchet MS" pitchFamily="34" charset="-122"/>
                 <a:cs typeface="Trebuchet MS" pitchFamily="34" charset="-120"/>
               </a:rPr>
-              <a:t>com</a:t>
-            </a:r>
-            <a:endParaRPr lang="en-US" sz="1400" dirty="0"/>
-          </a:p>
-        </p:txBody>
-      </p:sp>
-      <p:sp>
-        <p:nvSpPr>
-          <p:cNvPr id="35" name="Text 33"/>
-          <p:cNvSpPr/>
-          <p:nvPr/>
-        </p:nvSpPr>
-        <p:spPr>
-          <a:xfrm>
-            <a:off x="3959352" y="3364992"/>
-            <a:ext cx="411480" cy="475488"/>
+              <a:t>er</a:t>
+            </a:r>
+            <a:endParaRPr lang="en-US" sz="900" dirty="0"/>
+          </a:p>
+        </p:txBody>
+      </p:sp>
+      <p:sp>
+        <p:nvSpPr>
+          <p:cNvPr id="37" name="Shape 35"/>
+          <p:cNvSpPr/>
+          <p:nvPr/>
+        </p:nvSpPr>
+        <p:spPr>
+          <a:xfrm>
+            <a:off x="4850892" y="4169664"/>
+            <a:ext cx="685800" cy="475488"/>
+          </a:xfrm>
+          <a:prstGeom prst="rect">
+            <a:avLst>
+              <a:gd name="adj" fmla="val 7692"/>
+            </a:avLst>
+          </a:prstGeom>
+          <a:solidFill>
+            <a:srgbClr val="FFFFFF"/>
+          </a:solidFill>
+          <a:ln w="12700">
+            <a:solidFill>
+              <a:srgbClr val="DB2777"/>
+            </a:solidFill>
+            <a:prstDash val="solid"/>
+          </a:ln>
+        </p:spPr>
+      </p:sp>
+      <p:sp>
+        <p:nvSpPr>
+          <p:cNvPr id="38" name="Text 36"/>
+          <p:cNvSpPr/>
+          <p:nvPr/>
+        </p:nvSpPr>
+        <p:spPr>
+          <a:xfrm>
+            <a:off x="4850892" y="4169664"/>
+            <a:ext cx="685800" cy="475488"/>
           </a:xfrm>
           <a:prstGeom prst="rect">
             <a:avLst/>
@@ -31740,34 +30978,34 @@
               <a:buNone/>
             </a:pPr>
             <a:r>
-              <a:rPr lang="en-US" sz="1600" b="1" dirty="0">
-                <a:solidFill>
-                  <a:srgbClr val="0D9488"/>
+              <a:rPr lang="en-US" sz="900" b="1" dirty="0">
+                <a:solidFill>
+                  <a:srgbClr val="9D174D"/>
                 </a:solidFill>
                 <a:latin typeface="Trebuchet MS" pitchFamily="34" charset="0"/>
                 <a:ea typeface="Trebuchet MS" pitchFamily="34" charset="-122"/>
                 <a:cs typeface="Trebuchet MS" pitchFamily="34" charset="-120"/>
               </a:rPr>
-              <a:t>·</a:t>
-            </a:r>
-            <a:endParaRPr lang="en-US" sz="1600" dirty="0"/>
-          </a:p>
-        </p:txBody>
-      </p:sp>
-      <p:sp>
-        <p:nvSpPr>
-          <p:cNvPr id="36" name="Shape 34"/>
-          <p:cNvSpPr/>
-          <p:nvPr/>
-        </p:nvSpPr>
-        <p:spPr>
-          <a:xfrm>
-            <a:off x="4370832" y="3364992"/>
-            <a:ext cx="1645920" cy="475488"/>
+              <a:t>m</a:t>
+            </a:r>
+            <a:endParaRPr lang="en-US" sz="900" dirty="0"/>
+          </a:p>
+        </p:txBody>
+      </p:sp>
+      <p:sp>
+        <p:nvSpPr>
+          <p:cNvPr id="39" name="Shape 37"/>
+          <p:cNvSpPr/>
+          <p:nvPr/>
+        </p:nvSpPr>
+        <p:spPr>
+          <a:xfrm>
+            <a:off x="6062472" y="4169664"/>
+            <a:ext cx="685800" cy="475488"/>
           </a:xfrm>
           <a:prstGeom prst="rect">
             <a:avLst>
-              <a:gd name="adj" fmla="val 9615"/>
+              <a:gd name="adj" fmla="val 7692"/>
             </a:avLst>
           </a:prstGeom>
           <a:solidFill>
@@ -31775,22 +31013,22 @@
           </a:solidFill>
           <a:ln w="12700">
             <a:solidFill>
-              <a:srgbClr val="0D9488"/>
-            </a:solidFill>
-            <a:prstDash val="solid"/>
-          </a:ln>
-        </p:spPr>
-      </p:sp>
-      <p:sp>
-        <p:nvSpPr>
-          <p:cNvPr id="37" name="Text 35"/>
-          <p:cNvSpPr/>
-          <p:nvPr/>
-        </p:nvSpPr>
-        <p:spPr>
-          <a:xfrm>
-            <a:off x="4370832" y="3364992"/>
-            <a:ext cx="1645920" cy="475488"/>
+              <a:srgbClr val="DB2777"/>
+            </a:solidFill>
+            <a:prstDash val="solid"/>
+          </a:ln>
+        </p:spPr>
+      </p:sp>
+      <p:sp>
+        <p:nvSpPr>
+          <p:cNvPr id="40" name="Text 38"/>
+          <p:cNvSpPr/>
+          <p:nvPr/>
+        </p:nvSpPr>
+        <p:spPr>
+          <a:xfrm>
+            <a:off x="6062472" y="4169664"/>
+            <a:ext cx="685800" cy="475488"/>
           </a:xfrm>
           <a:prstGeom prst="rect">
             <a:avLst/>
@@ -31806,30 +31044,57 @@
               <a:buNone/>
             </a:pPr>
             <a:r>
-              <a:rPr lang="en-US" sz="1400" b="1" dirty="0">
-                <a:solidFill>
-                  <a:srgbClr val="0D9488"/>
+              <a:rPr lang="en-US" sz="900" b="1" dirty="0">
+                <a:solidFill>
+                  <a:srgbClr val="9D174D"/>
                 </a:solidFill>
                 <a:latin typeface="Trebuchet MS" pitchFamily="34" charset="0"/>
                 <a:ea typeface="Trebuchet MS" pitchFamily="34" charset="-122"/>
                 <a:cs typeface="Trebuchet MS" pitchFamily="34" charset="-120"/>
               </a:rPr>
-              <a:t>mit</a:t>
-            </a:r>
-            <a:endParaRPr lang="en-US" sz="1400" dirty="0"/>
-          </a:p>
-        </p:txBody>
-      </p:sp>
-      <p:sp>
-        <p:nvSpPr>
-          <p:cNvPr id="38" name="Text 36"/>
-          <p:cNvSpPr/>
-          <p:nvPr/>
-        </p:nvSpPr>
-        <p:spPr>
-          <a:xfrm>
-            <a:off x="6016752" y="3364992"/>
-            <a:ext cx="411480" cy="475488"/>
+              <a:t>i</a:t>
+            </a:r>
+            <a:endParaRPr lang="en-US" sz="900" dirty="0"/>
+          </a:p>
+        </p:txBody>
+      </p:sp>
+      <p:sp>
+        <p:nvSpPr>
+          <p:cNvPr id="41" name="Shape 39"/>
+          <p:cNvSpPr/>
+          <p:nvPr/>
+        </p:nvSpPr>
+        <p:spPr>
+          <a:xfrm>
+            <a:off x="7274052" y="4169664"/>
+            <a:ext cx="685800" cy="475488"/>
+          </a:xfrm>
+          <a:prstGeom prst="rect">
+            <a:avLst>
+              <a:gd name="adj" fmla="val 7692"/>
+            </a:avLst>
+          </a:prstGeom>
+          <a:solidFill>
+            <a:srgbClr val="FFFFFF"/>
+          </a:solidFill>
+          <a:ln w="12700">
+            <a:solidFill>
+              <a:srgbClr val="DB2777"/>
+            </a:solidFill>
+            <a:prstDash val="solid"/>
+          </a:ln>
+        </p:spPr>
+      </p:sp>
+      <p:sp>
+        <p:nvSpPr>
+          <p:cNvPr id="42" name="Text 40"/>
+          <p:cNvSpPr/>
+          <p:nvPr/>
+        </p:nvSpPr>
+        <p:spPr>
+          <a:xfrm>
+            <a:off x="7274052" y="4169664"/>
+            <a:ext cx="685800" cy="475488"/>
           </a:xfrm>
           <a:prstGeom prst="rect">
             <a:avLst/>
@@ -31845,675 +31110,15 @@
               <a:buNone/>
             </a:pPr>
             <a:r>
-              <a:rPr lang="en-US" sz="1600" b="1" dirty="0">
-                <a:solidFill>
-                  <a:srgbClr val="0D9488"/>
+              <a:rPr lang="en-US" sz="900" b="1" dirty="0">
+                <a:solidFill>
+                  <a:srgbClr val="9D174D"/>
                 </a:solidFill>
                 <a:latin typeface="Trebuchet MS" pitchFamily="34" charset="0"/>
                 <a:ea typeface="Trebuchet MS" pitchFamily="34" charset="-122"/>
                 <a:cs typeface="Trebuchet MS" pitchFamily="34" charset="-120"/>
               </a:rPr>
-              <a:t>·</a:t>
-            </a:r>
-            <a:endParaRPr lang="en-US" sz="1600" dirty="0"/>
-          </a:p>
-        </p:txBody>
-      </p:sp>
-      <p:sp>
-        <p:nvSpPr>
-          <p:cNvPr id="39" name="Shape 37"/>
-          <p:cNvSpPr/>
-          <p:nvPr/>
-        </p:nvSpPr>
-        <p:spPr>
-          <a:xfrm>
-            <a:off x="6428232" y="3364992"/>
-            <a:ext cx="1645920" cy="475488"/>
-          </a:xfrm>
-          <a:prstGeom prst="rect">
-            <a:avLst>
-              <a:gd name="adj" fmla="val 9615"/>
-            </a:avLst>
-          </a:prstGeom>
-          <a:solidFill>
-            <a:srgbClr val="FFFFFF"/>
-          </a:solidFill>
-          <a:ln w="12700">
-            <a:solidFill>
-              <a:srgbClr val="0D9488"/>
-            </a:solidFill>
-            <a:prstDash val="solid"/>
-          </a:ln>
-        </p:spPr>
-      </p:sp>
-      <p:sp>
-        <p:nvSpPr>
-          <p:cNvPr id="40" name="Text 38"/>
-          <p:cNvSpPr/>
-          <p:nvPr/>
-        </p:nvSpPr>
-        <p:spPr>
-          <a:xfrm>
-            <a:off x="6428232" y="3364992"/>
-            <a:ext cx="1645920" cy="475488"/>
-          </a:xfrm>
-          <a:prstGeom prst="rect">
-            <a:avLst/>
-          </a:prstGeom>
-          <a:noFill/>
-          <a:ln/>
-        </p:spPr>
-        <p:txBody>
-          <a:bodyPr wrap="square" lIns="0" tIns="0" rIns="0" bIns="0" rtlCol="0" anchor="ctr"/>
-          <a:lstStyle/>
-          <a:p>
-            <a:pPr algn="ctr" indent="0" marL="0">
-              <a:buNone/>
-            </a:pPr>
-            <a:r>
-              <a:rPr lang="en-US" sz="1400" b="1" dirty="0">
-                <a:solidFill>
-                  <a:srgbClr val="0D9488"/>
-                </a:solidFill>
-                <a:latin typeface="Trebuchet MS" pitchFamily="34" charset="0"/>
-                <a:ea typeface="Trebuchet MS" pitchFamily="34" charset="-122"/>
-                <a:cs typeface="Trebuchet MS" pitchFamily="34" charset="-120"/>
-              </a:rPr>
-              <a:t>ted</a:t>
-            </a:r>
-            <a:endParaRPr lang="en-US" sz="1400" dirty="0"/>
-          </a:p>
-        </p:txBody>
-      </p:sp>
-      <p:sp>
-        <p:nvSpPr>
-          <p:cNvPr id="41" name="Shape 39"/>
-          <p:cNvSpPr/>
-          <p:nvPr/>
-        </p:nvSpPr>
-        <p:spPr>
-          <a:xfrm>
-            <a:off x="365760" y="4096512"/>
-            <a:ext cx="1371600" cy="804672"/>
-          </a:xfrm>
-          <a:prstGeom prst="rect">
-            <a:avLst>
-              <a:gd name="adj" fmla="val 6818"/>
-            </a:avLst>
-          </a:prstGeom>
-          <a:solidFill>
-            <a:srgbClr val="E2E8F0"/>
-          </a:solidFill>
-          <a:ln w="12700">
-            <a:solidFill>
-              <a:srgbClr val="E2E8F0"/>
-            </a:solidFill>
-            <a:prstDash val="solid"/>
-          </a:ln>
-        </p:spPr>
-      </p:sp>
-      <p:sp>
-        <p:nvSpPr>
-          <p:cNvPr id="42" name="Text 40"/>
-          <p:cNvSpPr/>
-          <p:nvPr/>
-        </p:nvSpPr>
-        <p:spPr>
-          <a:xfrm>
-            <a:off x="365760" y="4096512"/>
-            <a:ext cx="1371600" cy="804672"/>
-          </a:xfrm>
-          <a:prstGeom prst="rect">
-            <a:avLst/>
-          </a:prstGeom>
-          <a:noFill/>
-          <a:ln/>
-        </p:spPr>
-        <p:txBody>
-          <a:bodyPr wrap="square" lIns="0" tIns="0" rIns="0" bIns="0" rtlCol="0" anchor="ctr"/>
-          <a:lstStyle/>
-          <a:p>
-            <a:pPr algn="ctr" indent="0" marL="0">
-              <a:buNone/>
-            </a:pPr>
-            <a:r>
-              <a:rPr lang="en-US" sz="1100" b="1" dirty="0">
-                <a:solidFill>
-                  <a:srgbClr val="475569"/>
-                </a:solidFill>
-                <a:latin typeface="Trebuchet MS" pitchFamily="34" charset="0"/>
-                <a:ea typeface="Trebuchet MS" pitchFamily="34" charset="-122"/>
-                <a:cs typeface="Trebuchet MS" pitchFamily="34" charset="-120"/>
-              </a:rPr>
-              <a:t>Phonemes</a:t>
-            </a:r>
-            <a:endParaRPr lang="en-US" sz="1100" dirty="0"/>
-          </a:p>
-        </p:txBody>
-      </p:sp>
-      <p:sp>
-        <p:nvSpPr>
-          <p:cNvPr id="43" name="Shape 41"/>
-          <p:cNvSpPr/>
-          <p:nvPr/>
-        </p:nvSpPr>
-        <p:spPr>
-          <a:xfrm>
-            <a:off x="1874520" y="4096512"/>
-            <a:ext cx="6903720" cy="804672"/>
-          </a:xfrm>
-          <a:prstGeom prst="rect">
-            <a:avLst>
-              <a:gd name="adj" fmla="val 6818"/>
-            </a:avLst>
-          </a:prstGeom>
-          <a:solidFill>
-            <a:srgbClr val="FCE7F3"/>
-          </a:solidFill>
-          <a:ln w="12700">
-            <a:solidFill>
-              <a:srgbClr val="DB2777"/>
-            </a:solidFill>
-            <a:prstDash val="solid"/>
-          </a:ln>
-        </p:spPr>
-      </p:sp>
-      <p:sp>
-        <p:nvSpPr>
-          <p:cNvPr id="44" name="Shape 42"/>
-          <p:cNvSpPr/>
-          <p:nvPr/>
-        </p:nvSpPr>
-        <p:spPr>
-          <a:xfrm>
-            <a:off x="2124837" y="4169664"/>
-            <a:ext cx="685800" cy="384048"/>
-          </a:xfrm>
-          <a:prstGeom prst="rect">
-            <a:avLst>
-              <a:gd name="adj" fmla="val 9524"/>
-            </a:avLst>
-          </a:prstGeom>
-          <a:solidFill>
-            <a:srgbClr val="FFFFFF"/>
-          </a:solidFill>
-          <a:ln w="12700">
-            <a:solidFill>
-              <a:srgbClr val="DB2777"/>
-            </a:solidFill>
-            <a:prstDash val="solid"/>
-          </a:ln>
-        </p:spPr>
-      </p:sp>
-      <p:sp>
-        <p:nvSpPr>
-          <p:cNvPr id="45" name="Text 43"/>
-          <p:cNvSpPr/>
-          <p:nvPr/>
-        </p:nvSpPr>
-        <p:spPr>
-          <a:xfrm>
-            <a:off x="2124837" y="4169664"/>
-            <a:ext cx="685800" cy="384048"/>
-          </a:xfrm>
-          <a:prstGeom prst="rect">
-            <a:avLst/>
-          </a:prstGeom>
-          <a:noFill/>
-          <a:ln/>
-        </p:spPr>
-        <p:txBody>
-          <a:bodyPr wrap="square" lIns="0" tIns="0" rIns="0" bIns="0" rtlCol="0" anchor="ctr"/>
-          <a:lstStyle/>
-          <a:p>
-            <a:pPr algn="ctr" indent="0" marL="0">
-              <a:buNone/>
-            </a:pPr>
-            <a:r>
-              <a:rPr lang="en-US" sz="900" b="1" dirty="0">
-                <a:solidFill>
-                  <a:srgbClr val="9D174D"/>
-                </a:solidFill>
-                <a:latin typeface="Trebuchet MS" pitchFamily="34" charset="0"/>
-                <a:ea typeface="Trebuchet MS" pitchFamily="34" charset="-122"/>
-                <a:cs typeface="Trebuchet MS" pitchFamily="34" charset="-120"/>
-              </a:rPr>
-              <a:t>c</a:t>
-            </a:r>
-            <a:endParaRPr lang="en-US" sz="900" dirty="0"/>
-          </a:p>
-        </p:txBody>
-      </p:sp>
-      <p:sp>
-        <p:nvSpPr>
-          <p:cNvPr id="46" name="Text 44"/>
-          <p:cNvSpPr/>
-          <p:nvPr/>
-        </p:nvSpPr>
-        <p:spPr>
-          <a:xfrm>
-            <a:off x="2124837" y="4572000"/>
-            <a:ext cx="685800" cy="219456"/>
-          </a:xfrm>
-          <a:prstGeom prst="rect">
-            <a:avLst/>
-          </a:prstGeom>
-          <a:noFill/>
-          <a:ln/>
-        </p:spPr>
-        <p:txBody>
-          <a:bodyPr wrap="square" lIns="0" tIns="0" rIns="0" bIns="0" rtlCol="0" anchor="t"/>
-          <a:lstStyle/>
-          <a:p>
-            <a:pPr algn="ctr" indent="0" marL="0">
-              <a:buNone/>
-            </a:pPr>
-            <a:r>
-              <a:rPr lang="en-US" sz="750" i="1" dirty="0">
-                <a:solidFill>
-                  <a:srgbClr val="94A3B8"/>
-                </a:solidFill>
-                <a:latin typeface="Calibri" pitchFamily="34" charset="0"/>
-                <a:ea typeface="Calibri" pitchFamily="34" charset="-122"/>
-                <a:cs typeface="Calibri" pitchFamily="34" charset="-120"/>
-              </a:rPr>
-              <a:t>/k/</a:t>
-            </a:r>
-            <a:endParaRPr lang="en-US" sz="750" dirty="0"/>
-          </a:p>
-        </p:txBody>
-      </p:sp>
-      <p:sp>
-        <p:nvSpPr>
-          <p:cNvPr id="47" name="Shape 45"/>
-          <p:cNvSpPr/>
-          <p:nvPr/>
-        </p:nvSpPr>
-        <p:spPr>
-          <a:xfrm>
-            <a:off x="3033522" y="4169664"/>
-            <a:ext cx="685800" cy="384048"/>
-          </a:xfrm>
-          <a:prstGeom prst="rect">
-            <a:avLst>
-              <a:gd name="adj" fmla="val 9524"/>
-            </a:avLst>
-          </a:prstGeom>
-          <a:solidFill>
-            <a:srgbClr val="FFFFFF"/>
-          </a:solidFill>
-          <a:ln w="12700">
-            <a:solidFill>
-              <a:srgbClr val="DB2777"/>
-            </a:solidFill>
-            <a:prstDash val="solid"/>
-          </a:ln>
-        </p:spPr>
-      </p:sp>
-      <p:sp>
-        <p:nvSpPr>
-          <p:cNvPr id="48" name="Text 46"/>
-          <p:cNvSpPr/>
-          <p:nvPr/>
-        </p:nvSpPr>
-        <p:spPr>
-          <a:xfrm>
-            <a:off x="3033522" y="4169664"/>
-            <a:ext cx="685800" cy="384048"/>
-          </a:xfrm>
-          <a:prstGeom prst="rect">
-            <a:avLst/>
-          </a:prstGeom>
-          <a:noFill/>
-          <a:ln/>
-        </p:spPr>
-        <p:txBody>
-          <a:bodyPr wrap="square" lIns="0" tIns="0" rIns="0" bIns="0" rtlCol="0" anchor="ctr"/>
-          <a:lstStyle/>
-          <a:p>
-            <a:pPr algn="ctr" indent="0" marL="0">
-              <a:buNone/>
-            </a:pPr>
-            <a:r>
-              <a:rPr lang="en-US" sz="900" b="1" dirty="0">
-                <a:solidFill>
-                  <a:srgbClr val="9D174D"/>
-                </a:solidFill>
-                <a:latin typeface="Trebuchet MS" pitchFamily="34" charset="0"/>
-                <a:ea typeface="Trebuchet MS" pitchFamily="34" charset="-122"/>
-                <a:cs typeface="Trebuchet MS" pitchFamily="34" charset="-120"/>
-              </a:rPr>
-              <a:t>o</a:t>
-            </a:r>
-            <a:endParaRPr lang="en-US" sz="900" dirty="0"/>
-          </a:p>
-        </p:txBody>
-      </p:sp>
-      <p:sp>
-        <p:nvSpPr>
-          <p:cNvPr id="49" name="Shape 47"/>
-          <p:cNvSpPr/>
-          <p:nvPr/>
-        </p:nvSpPr>
-        <p:spPr>
-          <a:xfrm>
-            <a:off x="3942207" y="4169664"/>
-            <a:ext cx="685800" cy="384048"/>
-          </a:xfrm>
-          <a:prstGeom prst="rect">
-            <a:avLst>
-              <a:gd name="adj" fmla="val 9524"/>
-            </a:avLst>
-          </a:prstGeom>
-          <a:solidFill>
-            <a:srgbClr val="FFFFFF"/>
-          </a:solidFill>
-          <a:ln w="12700">
-            <a:solidFill>
-              <a:srgbClr val="DB2777"/>
-            </a:solidFill>
-            <a:prstDash val="solid"/>
-          </a:ln>
-        </p:spPr>
-      </p:sp>
-      <p:sp>
-        <p:nvSpPr>
-          <p:cNvPr id="50" name="Text 48"/>
-          <p:cNvSpPr/>
-          <p:nvPr/>
-        </p:nvSpPr>
-        <p:spPr>
-          <a:xfrm>
-            <a:off x="3942207" y="4169664"/>
-            <a:ext cx="685800" cy="384048"/>
-          </a:xfrm>
-          <a:prstGeom prst="rect">
-            <a:avLst/>
-          </a:prstGeom>
-          <a:noFill/>
-          <a:ln/>
-        </p:spPr>
-        <p:txBody>
-          <a:bodyPr wrap="square" lIns="0" tIns="0" rIns="0" bIns="0" rtlCol="0" anchor="ctr"/>
-          <a:lstStyle/>
-          <a:p>
-            <a:pPr algn="ctr" indent="0" marL="0">
-              <a:buNone/>
-            </a:pPr>
-            <a:r>
-              <a:rPr lang="en-US" sz="900" b="1" dirty="0">
-                <a:solidFill>
-                  <a:srgbClr val="9D174D"/>
-                </a:solidFill>
-                <a:latin typeface="Trebuchet MS" pitchFamily="34" charset="0"/>
-                <a:ea typeface="Trebuchet MS" pitchFamily="34" charset="-122"/>
-                <a:cs typeface="Trebuchet MS" pitchFamily="34" charset="-120"/>
-              </a:rPr>
-              <a:t>mm</a:t>
-            </a:r>
-            <a:endParaRPr lang="en-US" sz="900" dirty="0"/>
-          </a:p>
-        </p:txBody>
-      </p:sp>
-      <p:sp>
-        <p:nvSpPr>
-          <p:cNvPr id="51" name="Shape 49"/>
-          <p:cNvSpPr/>
-          <p:nvPr/>
-        </p:nvSpPr>
-        <p:spPr>
-          <a:xfrm>
-            <a:off x="4850892" y="4169664"/>
-            <a:ext cx="685800" cy="384048"/>
-          </a:xfrm>
-          <a:prstGeom prst="rect">
-            <a:avLst>
-              <a:gd name="adj" fmla="val 9524"/>
-            </a:avLst>
-          </a:prstGeom>
-          <a:solidFill>
-            <a:srgbClr val="FFFFFF"/>
-          </a:solidFill>
-          <a:ln w="12700">
-            <a:solidFill>
-              <a:srgbClr val="DB2777"/>
-            </a:solidFill>
-            <a:prstDash val="solid"/>
-          </a:ln>
-        </p:spPr>
-      </p:sp>
-      <p:sp>
-        <p:nvSpPr>
-          <p:cNvPr id="52" name="Text 50"/>
-          <p:cNvSpPr/>
-          <p:nvPr/>
-        </p:nvSpPr>
-        <p:spPr>
-          <a:xfrm>
-            <a:off x="4850892" y="4169664"/>
-            <a:ext cx="685800" cy="384048"/>
-          </a:xfrm>
-          <a:prstGeom prst="rect">
-            <a:avLst/>
-          </a:prstGeom>
-          <a:noFill/>
-          <a:ln/>
-        </p:spPr>
-        <p:txBody>
-          <a:bodyPr wrap="square" lIns="0" tIns="0" rIns="0" bIns="0" rtlCol="0" anchor="ctr"/>
-          <a:lstStyle/>
-          <a:p>
-            <a:pPr algn="ctr" indent="0" marL="0">
-              <a:buNone/>
-            </a:pPr>
-            <a:r>
-              <a:rPr lang="en-US" sz="900" b="1" dirty="0">
-                <a:solidFill>
-                  <a:srgbClr val="9D174D"/>
-                </a:solidFill>
-                <a:latin typeface="Trebuchet MS" pitchFamily="34" charset="0"/>
-                <a:ea typeface="Trebuchet MS" pitchFamily="34" charset="-122"/>
-                <a:cs typeface="Trebuchet MS" pitchFamily="34" charset="-120"/>
-              </a:rPr>
-              <a:t>i</a:t>
-            </a:r>
-            <a:endParaRPr lang="en-US" sz="900" dirty="0"/>
-          </a:p>
-        </p:txBody>
-      </p:sp>
-      <p:sp>
-        <p:nvSpPr>
-          <p:cNvPr id="53" name="Shape 51"/>
-          <p:cNvSpPr/>
-          <p:nvPr/>
-        </p:nvSpPr>
-        <p:spPr>
-          <a:xfrm>
-            <a:off x="5759577" y="4169664"/>
-            <a:ext cx="685800" cy="384048"/>
-          </a:xfrm>
-          <a:prstGeom prst="rect">
-            <a:avLst>
-              <a:gd name="adj" fmla="val 9524"/>
-            </a:avLst>
-          </a:prstGeom>
-          <a:solidFill>
-            <a:srgbClr val="FFFFFF"/>
-          </a:solidFill>
-          <a:ln w="12700">
-            <a:solidFill>
-              <a:srgbClr val="DB2777"/>
-            </a:solidFill>
-            <a:prstDash val="solid"/>
-          </a:ln>
-        </p:spPr>
-      </p:sp>
-      <p:sp>
-        <p:nvSpPr>
-          <p:cNvPr id="54" name="Text 52"/>
-          <p:cNvSpPr/>
-          <p:nvPr/>
-        </p:nvSpPr>
-        <p:spPr>
-          <a:xfrm>
-            <a:off x="5759577" y="4169664"/>
-            <a:ext cx="685800" cy="384048"/>
-          </a:xfrm>
-          <a:prstGeom prst="rect">
-            <a:avLst/>
-          </a:prstGeom>
-          <a:noFill/>
-          <a:ln/>
-        </p:spPr>
-        <p:txBody>
-          <a:bodyPr wrap="square" lIns="0" tIns="0" rIns="0" bIns="0" rtlCol="0" anchor="ctr"/>
-          <a:lstStyle/>
-          <a:p>
-            <a:pPr algn="ctr" indent="0" marL="0">
-              <a:buNone/>
-            </a:pPr>
-            <a:r>
-              <a:rPr lang="en-US" sz="900" b="1" dirty="0">
-                <a:solidFill>
-                  <a:srgbClr val="9D174D"/>
-                </a:solidFill>
-                <a:latin typeface="Trebuchet MS" pitchFamily="34" charset="0"/>
-                <a:ea typeface="Trebuchet MS" pitchFamily="34" charset="-122"/>
-                <a:cs typeface="Trebuchet MS" pitchFamily="34" charset="-120"/>
-              </a:rPr>
-              <a:t>tt</a:t>
-            </a:r>
-            <a:endParaRPr lang="en-US" sz="900" dirty="0"/>
-          </a:p>
-        </p:txBody>
-      </p:sp>
-      <p:sp>
-        <p:nvSpPr>
-          <p:cNvPr id="55" name="Shape 53"/>
-          <p:cNvSpPr/>
-          <p:nvPr/>
-        </p:nvSpPr>
-        <p:spPr>
-          <a:xfrm>
-            <a:off x="6668262" y="4169664"/>
-            <a:ext cx="685800" cy="384048"/>
-          </a:xfrm>
-          <a:prstGeom prst="rect">
-            <a:avLst>
-              <a:gd name="adj" fmla="val 9524"/>
-            </a:avLst>
-          </a:prstGeom>
-          <a:solidFill>
-            <a:srgbClr val="FFFFFF"/>
-          </a:solidFill>
-          <a:ln w="12700">
-            <a:solidFill>
-              <a:srgbClr val="DB2777"/>
-            </a:solidFill>
-            <a:prstDash val="solid"/>
-          </a:ln>
-        </p:spPr>
-      </p:sp>
-      <p:sp>
-        <p:nvSpPr>
-          <p:cNvPr id="56" name="Text 54"/>
-          <p:cNvSpPr/>
-          <p:nvPr/>
-        </p:nvSpPr>
-        <p:spPr>
-          <a:xfrm>
-            <a:off x="6668262" y="4169664"/>
-            <a:ext cx="685800" cy="384048"/>
-          </a:xfrm>
-          <a:prstGeom prst="rect">
-            <a:avLst/>
-          </a:prstGeom>
-          <a:noFill/>
-          <a:ln/>
-        </p:spPr>
-        <p:txBody>
-          <a:bodyPr wrap="square" lIns="0" tIns="0" rIns="0" bIns="0" rtlCol="0" anchor="ctr"/>
-          <a:lstStyle/>
-          <a:p>
-            <a:pPr algn="ctr" indent="0" marL="0">
-              <a:buNone/>
-            </a:pPr>
-            <a:r>
-              <a:rPr lang="en-US" sz="900" b="1" dirty="0">
-                <a:solidFill>
-                  <a:srgbClr val="9D174D"/>
-                </a:solidFill>
-                <a:latin typeface="Trebuchet MS" pitchFamily="34" charset="0"/>
-                <a:ea typeface="Trebuchet MS" pitchFamily="34" charset="-122"/>
-                <a:cs typeface="Trebuchet MS" pitchFamily="34" charset="-120"/>
-              </a:rPr>
-              <a:t>e</a:t>
-            </a:r>
-            <a:endParaRPr lang="en-US" sz="900" dirty="0"/>
-          </a:p>
-        </p:txBody>
-      </p:sp>
-      <p:sp>
-        <p:nvSpPr>
-          <p:cNvPr id="57" name="Shape 55"/>
-          <p:cNvSpPr/>
-          <p:nvPr/>
-        </p:nvSpPr>
-        <p:spPr>
-          <a:xfrm>
-            <a:off x="7576947" y="4169664"/>
-            <a:ext cx="685800" cy="384048"/>
-          </a:xfrm>
-          <a:prstGeom prst="rect">
-            <a:avLst>
-              <a:gd name="adj" fmla="val 9524"/>
-            </a:avLst>
-          </a:prstGeom>
-          <a:solidFill>
-            <a:srgbClr val="FFFFFF"/>
-          </a:solidFill>
-          <a:ln w="12700">
-            <a:solidFill>
-              <a:srgbClr val="DB2777"/>
-            </a:solidFill>
-            <a:prstDash val="solid"/>
-          </a:ln>
-        </p:spPr>
-      </p:sp>
-      <p:sp>
-        <p:nvSpPr>
-          <p:cNvPr id="58" name="Text 56"/>
-          <p:cNvSpPr/>
-          <p:nvPr/>
-        </p:nvSpPr>
-        <p:spPr>
-          <a:xfrm>
-            <a:off x="7576947" y="4169664"/>
-            <a:ext cx="685800" cy="384048"/>
-          </a:xfrm>
-          <a:prstGeom prst="rect">
-            <a:avLst/>
-          </a:prstGeom>
-          <a:noFill/>
-          <a:ln/>
-        </p:spPr>
-        <p:txBody>
-          <a:bodyPr wrap="square" lIns="0" tIns="0" rIns="0" bIns="0" rtlCol="0" anchor="ctr"/>
-          <a:lstStyle/>
-          <a:p>
-            <a:pPr algn="ctr" indent="0" marL="0">
-              <a:buNone/>
-            </a:pPr>
-            <a:r>
-              <a:rPr lang="en-US" sz="900" b="1" dirty="0">
-                <a:solidFill>
-                  <a:srgbClr val="9D174D"/>
-                </a:solidFill>
-                <a:latin typeface="Trebuchet MS" pitchFamily="34" charset="0"/>
-                <a:ea typeface="Trebuchet MS" pitchFamily="34" charset="-122"/>
-                <a:cs typeface="Trebuchet MS" pitchFamily="34" charset="-120"/>
-              </a:rPr>
-              <a:t>d</a:t>
+              <a:t>t</a:t>
             </a:r>
             <a:endParaRPr lang="en-US" sz="900" dirty="0"/>
           </a:p>
@@ -34773,7 +33378,7 @@
                 <a:ea typeface="Trebuchet MS" pitchFamily="34" charset="-122"/>
                 <a:cs typeface="Trebuchet MS" pitchFamily="34" charset="-120"/>
               </a:rPr>
-              <a:t>ad-</a:t>
+              <a:t>com-</a:t>
             </a:r>
             <a:endParaRPr lang="en-US" sz="1300" dirty="0"/>
           </a:p>
@@ -34926,7 +33531,7 @@
                 <a:ea typeface="Trebuchet MS" pitchFamily="34" charset="-122"/>
                 <a:cs typeface="Trebuchet MS" pitchFamily="34" charset="-120"/>
               </a:rPr>
-              <a:t>e-</a:t>
+              <a:t>ad-</a:t>
             </a:r>
             <a:endParaRPr lang="en-US" sz="1300" dirty="0"/>
           </a:p>
@@ -35318,7 +33923,7 @@
                 <a:ea typeface="Trebuchet MS" pitchFamily="34" charset="-122"/>
                 <a:cs typeface="Trebuchet MS" pitchFamily="34" charset="-120"/>
               </a:rPr>
-              <a:t>admit</a:t>
+              <a:t>commit</a:t>
             </a:r>
             <a:endParaRPr lang="en-US" sz="1200" dirty="0"/>
           </a:p>
@@ -35384,7 +33989,7 @@
                 <a:ea typeface="Trebuchet MS" pitchFamily="34" charset="-122"/>
                 <a:cs typeface="Trebuchet MS" pitchFamily="34" charset="-120"/>
               </a:rPr>
-              <a:t>committed</a:t>
+              <a:t>admit</a:t>
             </a:r>
             <a:endParaRPr lang="en-US" sz="1200" dirty="0"/>
           </a:p>
@@ -35516,7 +34121,7 @@
                 <a:ea typeface="Trebuchet MS" pitchFamily="34" charset="-122"/>
                 <a:cs typeface="Trebuchet MS" pitchFamily="34" charset="-120"/>
               </a:rPr>
-              <a:t>remit</a:t>
+              <a:t>emit</a:t>
             </a:r>
             <a:endParaRPr lang="en-US" sz="1200" dirty="0"/>
           </a:p>
@@ -35582,7 +34187,7 @@
                 <a:ea typeface="Trebuchet MS" pitchFamily="34" charset="-122"/>
                 <a:cs typeface="Trebuchet MS" pitchFamily="34" charset="-120"/>
               </a:rPr>
-              <a:t>emitting</a:t>
+              <a:t>remit</a:t>
             </a:r>
             <a:endParaRPr lang="en-US" sz="1200" dirty="0"/>
           </a:p>
@@ -36909,7 +35514,7 @@
                 <a:ea typeface="Calibri" pitchFamily="34" charset="-122"/>
                 <a:cs typeface="Calibri" pitchFamily="34" charset="-120"/>
               </a:rPr>
-              <a:t>2.  The word 'permit' means to stop someone from doing something.</a:t>
+              <a:t>2.  The word 'omit' means to add extra information to a piece of writing.</a:t>
             </a:r>
             <a:endParaRPr lang="en-US" sz="1300" dirty="0"/>
           </a:p>
@@ -37048,7 +35653,7 @@
                 <a:ea typeface="Calibri" pitchFamily="34" charset="-122"/>
                 <a:cs typeface="Calibri" pitchFamily="34" charset="-120"/>
               </a:rPr>
-              <a:t>3.  The word 'transmit' contains the prefix 'trans', meaning across.</a:t>
+              <a:t>3.  The root 'mit' can be found in the word 'permit'.</a:t>
             </a:r>
             <a:endParaRPr lang="en-US" sz="1300" dirty="0"/>
           </a:p>
@@ -37187,7 +35792,7 @@
                 <a:ea typeface="Calibri" pitchFamily="34" charset="-122"/>
                 <a:cs typeface="Calibri" pitchFamily="34" charset="-120"/>
               </a:rPr>
-              <a:t>4.  The word 'submit' contains the root 'mit'.</a:t>
+              <a:t>4.  The word 'transmit' uses the prefix 'trans', meaning 'across'.</a:t>
             </a:r>
             <a:endParaRPr lang="en-US" sz="1300" dirty="0"/>
           </a:p>
@@ -37326,7 +35931,7 @@
                 <a:ea typeface="Calibri" pitchFamily="34" charset="-122"/>
                 <a:cs typeface="Calibri" pitchFamily="34" charset="-120"/>
               </a:rPr>
-              <a:t>5.  The root 'mit' comes from Greek.</a:t>
+              <a:t>5.  The root 'mit' originally comes from a Greek word.</a:t>
             </a:r>
             <a:endParaRPr lang="en-US" sz="1300" dirty="0"/>
           </a:p>
@@ -38163,7 +36768,7 @@
                 <a:ea typeface="Trebuchet MS" pitchFamily="34" charset="-122"/>
                 <a:cs typeface="Trebuchet MS" pitchFamily="34" charset="-120"/>
               </a:rPr>
-              <a:t>admit</a:t>
+              <a:t>commit</a:t>
             </a:r>
             <a:endParaRPr lang="en-US" sz="1300" dirty="0"/>
           </a:p>
@@ -38229,7 +36834,7 @@
                 <a:ea typeface="Trebuchet MS" pitchFamily="34" charset="-122"/>
                 <a:cs typeface="Trebuchet MS" pitchFamily="34" charset="-120"/>
               </a:rPr>
-              <a:t>committed</a:t>
+              <a:t>admit</a:t>
             </a:r>
             <a:endParaRPr lang="en-US" sz="1300" dirty="0"/>
           </a:p>
@@ -38361,7 +36966,7 @@
                 <a:ea typeface="Trebuchet MS" pitchFamily="34" charset="-122"/>
                 <a:cs typeface="Trebuchet MS" pitchFamily="34" charset="-120"/>
               </a:rPr>
-              <a:t>remit</a:t>
+              <a:t>emit</a:t>
             </a:r>
             <a:endParaRPr lang="en-US" sz="1300" dirty="0"/>
           </a:p>
@@ -39452,7 +38057,7 @@
                 <a:ea typeface="Trebuchet MS" pitchFamily="34" charset="-122"/>
                 <a:cs typeface="Trebuchet MS" pitchFamily="34" charset="-120"/>
               </a:rPr>
-              <a:t>ad-</a:t>
+              <a:t>com-</a:t>
             </a:r>
             <a:endParaRPr lang="en-US" sz="1300" dirty="0"/>
           </a:p>
@@ -39605,7 +38210,7 @@
                 <a:ea typeface="Trebuchet MS" pitchFamily="34" charset="-122"/>
                 <a:cs typeface="Trebuchet MS" pitchFamily="34" charset="-120"/>
               </a:rPr>
-              <a:t>e-</a:t>
+              <a:t>ad-</a:t>
             </a:r>
             <a:endParaRPr lang="en-US" sz="1300" dirty="0"/>
           </a:p>
@@ -40605,7 +39210,7 @@
                 <a:ea typeface="Calibri" pitchFamily="34" charset="-122"/>
                 <a:cs typeface="Calibri" pitchFamily="34" charset="-120"/>
               </a:rPr>
-              <a:t>To send money to someone, or the area of work you are responsible for.</a:t>
+              <a:t>To send out light, heat, sound, or a smell.</a:t>
             </a:r>
             <a:endParaRPr lang="en-US" sz="1200" dirty="0"/>
           </a:p>
@@ -40744,7 +39349,7 @@
                 <a:ea typeface="Calibri" pitchFamily="34" charset="-122"/>
                 <a:cs typeface="Calibri" pitchFamily="34" charset="-120"/>
               </a:rPr>
-              <a:t>To let someone in, or to say that something is true.</a:t>
+              <a:t>To promise to do something, or to carry out an action.</a:t>
             </a:r>
             <a:endParaRPr lang="en-US" sz="1200" dirty="0"/>
           </a:p>
@@ -40883,7 +39488,7 @@
                 <a:ea typeface="Calibri" pitchFamily="34" charset="-122"/>
                 <a:cs typeface="Calibri" pitchFamily="34" charset="-120"/>
               </a:rPr>
-              <a:t>Decided to do something and sticking with it.</a:t>
+              <a:t>To say that something is true, or to let someone enter a place.</a:t>
             </a:r>
             <a:endParaRPr lang="en-US" sz="1200" dirty="0"/>
           </a:p>
@@ -40956,7 +39561,7 @@
                 <a:ea typeface="Trebuchet MS" pitchFamily="34" charset="-122"/>
                 <a:cs typeface="Trebuchet MS" pitchFamily="34" charset="-120"/>
               </a:rPr>
-              <a:t>admit</a:t>
+              <a:t>commit</a:t>
             </a:r>
             <a:endParaRPr lang="en-US" sz="1200" dirty="0"/>
           </a:p>
@@ -41022,7 +39627,7 @@
                 <a:ea typeface="Calibri" pitchFamily="34" charset="-122"/>
                 <a:cs typeface="Calibri" pitchFamily="34" charset="-120"/>
               </a:rPr>
-              <a:t>To send a signal, message, or disease from one place to another.</a:t>
+              <a:t>To send a signal, message, or illness from one place or person to another.</a:t>
             </a:r>
             <a:endParaRPr lang="en-US" sz="1200" dirty="0"/>
           </a:p>
@@ -41095,7 +39700,7 @@
                 <a:ea typeface="Trebuchet MS" pitchFamily="34" charset="-122"/>
                 <a:cs typeface="Trebuchet MS" pitchFamily="34" charset="-120"/>
               </a:rPr>
-              <a:t>committed</a:t>
+              <a:t>admit</a:t>
             </a:r>
             <a:endParaRPr lang="en-US" sz="1200" dirty="0"/>
           </a:p>
@@ -41161,7 +39766,7 @@
                 <a:ea typeface="Calibri" pitchFamily="34" charset="-122"/>
                 <a:cs typeface="Calibri" pitchFamily="34" charset="-120"/>
               </a:rPr>
-              <a:t>To leave something out on purpose.</a:t>
+              <a:t>To leave something out on purpose or by accident.</a:t>
             </a:r>
             <a:endParaRPr lang="en-US" sz="1200" dirty="0"/>
           </a:p>
@@ -41300,7 +39905,7 @@
                 <a:ea typeface="Calibri" pitchFamily="34" charset="-122"/>
                 <a:cs typeface="Calibri" pitchFamily="34" charset="-120"/>
               </a:rPr>
-              <a:t>To hand something in or send it to someone in charge.</a:t>
+              <a:t>To hand something in or send it to someone in charge, like submitting your homework to a teacher.</a:t>
             </a:r>
             <a:endParaRPr lang="en-US" sz="1200" dirty="0"/>
           </a:p>
@@ -41373,7 +39978,7 @@
                 <a:ea typeface="Trebuchet MS" pitchFamily="34" charset="-122"/>
                 <a:cs typeface="Trebuchet MS" pitchFamily="34" charset="-120"/>
               </a:rPr>
-              <a:t>remit</a:t>
+              <a:t>emit</a:t>
             </a:r>
             <a:endParaRPr lang="en-US" sz="1200" dirty="0"/>
           </a:p>
@@ -41439,7 +40044,7 @@
                 <a:ea typeface="Calibri" pitchFamily="34" charset="-122"/>
                 <a:cs typeface="Calibri" pitchFamily="34" charset="-120"/>
               </a:rPr>
-              <a:t>To allow someone to do something.</a:t>
+              <a:t>To allow someone to do something, or a special card that lets you do something.</a:t>
             </a:r>
             <a:endParaRPr lang="en-US" sz="1200" dirty="0"/>
           </a:p>
@@ -41934,7 +40539,7 @@
                 <a:ea typeface="Calibri" pitchFamily="34" charset="-122"/>
                 <a:cs typeface="Calibri" pitchFamily="34" charset="-120"/>
               </a:rPr>
-              <a:t>Please submit your completed story to your teacher by Friday afternoon.</a:t>
+              <a:t>Please submit your assignment by Friday so the teacher has time to read it.</a:t>
             </a:r>
             <a:endParaRPr lang="en-US" sz="1500" dirty="0"/>
           </a:p>
@@ -42098,7 +40703,7 @@
                 <a:ea typeface="Calibri" pitchFamily="34" charset="-122"/>
                 <a:cs typeface="Calibri" pitchFamily="34" charset="-120"/>
               </a:rPr>
-              <a:t>The old radio tower was used to transmit emergency messages across the country.</a:t>
+              <a:t>The radio tower can transmit signals hundreds of kilometres across the country.</a:t>
             </a:r>
             <a:endParaRPr lang="en-US" sz="1500" dirty="0"/>
           </a:p>
@@ -42262,7 +40867,7 @@
                 <a:ea typeface="Calibri" pitchFamily="34" charset="-122"/>
                 <a:cs typeface="Calibri" pitchFamily="34" charset="-120"/>
               </a:rPr>
-              <a:t>The teacher will permit students to use a dictionary during the spelling test.</a:t>
+              <a:t>The coach would not permit anyone to enter the gym without the correct shoes.</a:t>
             </a:r>
             <a:endParaRPr lang="en-US" sz="1500" dirty="0"/>
           </a:p>
